--- a/lab1/Презентация.pptx
+++ b/lab1/Презентация.pptx
@@ -1,26 +1,26 @@
 
 <file path=ppt/presentation.xml><?xml version="1.0" encoding="utf-8"?>
-<p:presentation xmlns:a="http://schemas.openxmlformats.org/drawingml/2006/main" xmlns:r="http://schemas.openxmlformats.org/officeDocument/2006/relationships" xmlns:p="http://schemas.openxmlformats.org/presentationml/2006/main" xmlns:m="http://schemas.openxmlformats.org/officeDocument/2006/math" xmlns:w="http://schemas.openxmlformats.org/wordprocessingml/2006/main" autoCompressPictures="0" embedTrueTypeFonts="1" saveSubsetFonts="1" strictFirstAndLastChars="0">
+<p:presentation xmlns:a="http://schemas.openxmlformats.org/drawingml/2006/main" xmlns:r="http://schemas.openxmlformats.org/officeDocument/2006/relationships" xmlns:p="http://schemas.openxmlformats.org/presentationml/2006/main" strictFirstAndLastChars="0" embedTrueTypeFonts="1" saveSubsetFonts="1" autoCompressPictures="0">
   <p:sldMasterIdLst>
     <p:sldMasterId id="2147483648" r:id="rId1"/>
     <p:sldMasterId id="2147483660" r:id="rId2"/>
   </p:sldMasterIdLst>
   <p:notesMasterIdLst>
-    <p:notesMasterId r:id="rId16"/>
+    <p:notesMasterId r:id="rId13"/>
   </p:notesMasterIdLst>
   <p:sldIdLst>
-    <p:sldId id="256" r:id="rId6"/>
-    <p:sldId id="257" r:id="rId7"/>
-    <p:sldId id="258" r:id="rId8"/>
-    <p:sldId id="259" r:id="rId9"/>
-    <p:sldId id="260" r:id="rId10"/>
-    <p:sldId id="261" r:id="rId11"/>
-    <p:sldId id="262" r:id="rId12"/>
-    <p:sldId id="263" r:id="rId13"/>
-    <p:sldId id="264" r:id="rId14"/>
-    <p:sldId id="265" r:id="rId15"/>
+    <p:sldId id="256" r:id="rId3"/>
+    <p:sldId id="257" r:id="rId4"/>
+    <p:sldId id="258" r:id="rId5"/>
+    <p:sldId id="259" r:id="rId6"/>
+    <p:sldId id="260" r:id="rId7"/>
+    <p:sldId id="261" r:id="rId8"/>
+    <p:sldId id="262" r:id="rId9"/>
+    <p:sldId id="263" r:id="rId10"/>
+    <p:sldId id="264" r:id="rId11"/>
+    <p:sldId id="265" r:id="rId12"/>
   </p:sldIdLst>
-  <p:sldSz cx="9144000" cy="5143500"/>
+  <p:sldSz cx="9144000" cy="5143500" type="screen16x9"/>
   <p:notesSz cx="6858000" cy="9144000"/>
   <p:defaultTextStyle>
     <a:defPPr marR="0" lvl="0" algn="l">
@@ -242,6 +242,22 @@
       </a:defRPr>
     </a:lvl9pPr>
   </p:defaultTextStyle>
+  <p:extLst>
+    <p:ext uri="{EFAFB233-063F-42B5-8137-9DF3F51BA10A}">
+      <p15:sldGuideLst xmlns:p15="http://schemas.microsoft.com/office/powerpoint/2012/main">
+        <p15:guide id="1" orient="horz" pos="1620">
+          <p15:clr>
+            <a:srgbClr val="A4A3A4"/>
+          </p15:clr>
+        </p15:guide>
+        <p15:guide id="2" pos="2880">
+          <p15:clr>
+            <a:srgbClr val="A4A3A4"/>
+          </p15:clr>
+        </p15:guide>
+      </p15:sldGuideLst>
+    </p:ext>
+  </p:extLst>
 </p:presentation>
 </file>
 
@@ -252,8 +268,8 @@
 </file>
 
 <file path=ppt/comments/comment1.xml><?xml version="1.0" encoding="utf-8"?>
-<p:cmLst xmlns:a="http://schemas.openxmlformats.org/drawingml/2006/main" xmlns:r="http://schemas.openxmlformats.org/officeDocument/2006/relationships" xmlns:p="http://schemas.openxmlformats.org/presentationml/2006/main" xmlns:m="http://schemas.openxmlformats.org/officeDocument/2006/math" xmlns:w="http://schemas.openxmlformats.org/wordprocessingml/2006/main">
-  <p:cm authorId="1" dt="2025-10-09T19:27:46Z" idx="1">
+<p:cmLst xmlns:a="http://schemas.openxmlformats.org/drawingml/2006/main" xmlns:r="http://schemas.openxmlformats.org/officeDocument/2006/relationships" xmlns:p="http://schemas.openxmlformats.org/presentationml/2006/main">
+  <p:cm authorId="1" dt="2025-10-09T19:27:46" idx="1">
     <p:pos x="6000" y="0"/>
     <p:text>Предметная область — процесс погашения кредитной задолженности заемщиками банка.
 В кредитном отделе ведётся учет кредитных договоров и платежей заемщиков.
@@ -263,7 +279,7 @@
 Неудобный контроль задолженностей и начислений пени.</p:text>
     <p:extLst>
       <p:ext uri="{19B8F6BF-5375-455C-9EA6-DF929625EA0E}">
-        <p15:presenceInfo xmlns:p15="http://schemas.microsoft.com/office/powerpoint/2012/main" userId="teamlab_data:0;1;0;1;8;Rgtofobe;2;1;0;4;38;{000100CD-00CB-44CD-BEB2-0005001900E1};" providerId="AD"/>
+        <p15:presenceInfo xmlns:p15="http://schemas.microsoft.com/office/powerpoint/2012/main" xmlns:w="http://schemas.openxmlformats.org/wordprocessingml/2006/main" xmlns:m="http://schemas.openxmlformats.org/officeDocument/2006/math" xmlns="" userId="teamlab_data:0;1;0;1;8;Rgtofobe;2;1;0;4;38;{000100CD-00CB-44CD-BEB2-0005001900E1};" providerId="AD"/>
       </p:ext>
     </p:extLst>
   </p:cm>
@@ -271,8 +287,8 @@
 </file>
 
 <file path=ppt/comments/comment2.xml><?xml version="1.0" encoding="utf-8"?>
-<p:cmLst xmlns:a="http://schemas.openxmlformats.org/drawingml/2006/main" xmlns:r="http://schemas.openxmlformats.org/officeDocument/2006/relationships" xmlns:p="http://schemas.openxmlformats.org/presentationml/2006/main" xmlns:m="http://schemas.openxmlformats.org/officeDocument/2006/math" xmlns:w="http://schemas.openxmlformats.org/wordprocessingml/2006/main">
-  <p:cm authorId="1" dt="2025-10-09T19:47:49Z" idx="2">
+<p:cmLst xmlns:a="http://schemas.openxmlformats.org/drawingml/2006/main" xmlns:r="http://schemas.openxmlformats.org/officeDocument/2006/relationships" xmlns:p="http://schemas.openxmlformats.org/presentationml/2006/main">
+  <p:cm authorId="1" dt="2025-10-09T19:47:49" idx="2">
     <p:pos x="6000" y="0"/>
     <p:text>Методология:
 Метод контекстных диаграмм (DFD — Data Flow Diagram).
@@ -284,7 +300,7 @@
 Анализ потоков входных и выходных данных.</p:text>
     <p:extLst>
       <p:ext uri="{19B8F6BF-5375-455C-9EA6-DF929625EA0E}">
-        <p15:presenceInfo xmlns:p15="http://schemas.microsoft.com/office/powerpoint/2012/main" userId="teamlab_data:0;1;0;1;8;Rgtofobe;2;1;0;4;38;{00320093-0034-4663-B551-00440009002C};" providerId="AD"/>
+        <p15:presenceInfo xmlns:p15="http://schemas.microsoft.com/office/powerpoint/2012/main" xmlns:w="http://schemas.openxmlformats.org/wordprocessingml/2006/main" xmlns:m="http://schemas.openxmlformats.org/officeDocument/2006/math" xmlns="" userId="teamlab_data:0;1;0;1;8;Rgtofobe;2;1;0;4;38;{00320093-0034-4663-B551-00440009002C};" providerId="AD"/>
       </p:ext>
     </p:extLst>
   </p:cm>
@@ -293,7 +309,12 @@
 
 <file path=ppt/notesMasters/notesMaster1.xml><?xml version="1.0" encoding="utf-8"?>
 <p:notesMaster xmlns:a="http://schemas.openxmlformats.org/drawingml/2006/main" xmlns:r="http://schemas.openxmlformats.org/officeDocument/2006/relationships" xmlns:p="http://schemas.openxmlformats.org/presentationml/2006/main">
-  <p:cSld name="">
+  <p:cSld>
+    <p:bg>
+      <p:bgRef idx="1001">
+        <a:schemeClr val="bg1"/>
+      </p:bgRef>
+    </p:bg>
     <p:spTree>
       <p:nvGrpSpPr>
         <p:cNvPr id="1" name=""/>
@@ -311,7 +332,9 @@
       <p:sp>
         <p:nvSpPr>
           <p:cNvPr id="1647732901" name="Google Shape;3;n"/>
-          <p:cNvSpPr/>
+          <p:cNvSpPr>
+            <a:spLocks noGrp="1" noRot="1" noChangeAspect="1"/>
+          </p:cNvSpPr>
           <p:nvPr>
             <p:ph type="sldImg" idx="2"/>
           </p:nvPr>
@@ -328,7 +351,7 @@
             <a:cxnLst/>
             <a:rect l="l" t="t" r="r" b="b"/>
             <a:pathLst>
-              <a:path w="120000" h="120000" fill="norm" stroke="1" extrusionOk="0">
+              <a:path w="120000" h="120000" extrusionOk="0">
                 <a:moveTo>
                   <a:pt x="0" y="0"/>
                 </a:moveTo>
@@ -360,7 +383,9 @@
       <p:sp>
         <p:nvSpPr>
           <p:cNvPr id="725962101" name="Google Shape;4;n"/>
-          <p:cNvSpPr txBox="1"/>
+          <p:cNvSpPr txBox="1">
+            <a:spLocks noGrp="1"/>
+          </p:cNvSpPr>
           <p:nvPr>
             <p:ph type="body" idx="1"/>
           </p:nvPr>
@@ -718,8 +743,8 @@
 </file>
 
 <file path=ppt/notesSlides/notesSlide1.xml><?xml version="1.0" encoding="utf-8"?>
-<p:notes xmlns:a="http://schemas.openxmlformats.org/drawingml/2006/main" xmlns:r="http://schemas.openxmlformats.org/officeDocument/2006/relationships" xmlns:p="http://schemas.openxmlformats.org/presentationml/2006/main" xmlns:m="http://schemas.openxmlformats.org/officeDocument/2006/math" xmlns:w="http://schemas.openxmlformats.org/wordprocessingml/2006/main" showMasterPhAnim="0" showMasterSp="0">
-  <p:cSld name="">
+<p:notes xmlns:a="http://schemas.openxmlformats.org/drawingml/2006/main" xmlns:r="http://schemas.openxmlformats.org/officeDocument/2006/relationships" xmlns:p="http://schemas.openxmlformats.org/presentationml/2006/main" showMasterSp="0" showMasterPhAnim="0">
+  <p:cSld>
     <p:spTree>
       <p:nvGrpSpPr>
         <p:cNvPr id="1" name=""/>
@@ -737,7 +762,9 @@
       <p:sp>
         <p:nvSpPr>
           <p:cNvPr id="1949152618" name="Google Shape;197;g38ac66d765c_6_123:notes"/>
-          <p:cNvSpPr txBox="1"/>
+          <p:cNvSpPr txBox="1">
+            <a:spLocks noGrp="1"/>
+          </p:cNvSpPr>
           <p:nvPr>
             <p:ph type="body" idx="1"/>
           </p:nvPr>
@@ -774,7 +801,9 @@
       <p:sp>
         <p:nvSpPr>
           <p:cNvPr id="1913802337" name="Google Shape;198;g38ac66d765c_6_123:notes"/>
-          <p:cNvSpPr/>
+          <p:cNvSpPr>
+            <a:spLocks noGrp="1" noRot="1" noChangeAspect="1"/>
+          </p:cNvSpPr>
           <p:nvPr>
             <p:ph type="sldImg" idx="2"/>
           </p:nvPr>
@@ -791,7 +820,7 @@
             <a:cxnLst/>
             <a:rect l="l" t="t" r="r" b="b"/>
             <a:pathLst>
-              <a:path w="120000" h="120000" fill="norm" stroke="1" extrusionOk="0">
+              <a:path w="120000" h="120000" extrusionOk="0">
                 <a:moveTo>
                   <a:pt x="0" y="0"/>
                 </a:moveTo>
@@ -812,12 +841,15 @@
       </p:sp>
     </p:spTree>
   </p:cSld>
+  <p:clrMapOvr>
+    <a:masterClrMapping/>
+  </p:clrMapOvr>
 </p:notes>
 </file>
 
 <file path=ppt/notesSlides/notesSlide10.xml><?xml version="1.0" encoding="utf-8"?>
-<p:notes xmlns:a="http://schemas.openxmlformats.org/drawingml/2006/main" xmlns:r="http://schemas.openxmlformats.org/officeDocument/2006/relationships" xmlns:p="http://schemas.openxmlformats.org/presentationml/2006/main" xmlns:m="http://schemas.openxmlformats.org/officeDocument/2006/math" xmlns:w="http://schemas.openxmlformats.org/wordprocessingml/2006/main" showMasterPhAnim="0" showMasterSp="0">
-  <p:cSld name="">
+<p:notes xmlns:a="http://schemas.openxmlformats.org/drawingml/2006/main" xmlns:r="http://schemas.openxmlformats.org/officeDocument/2006/relationships" xmlns:p="http://schemas.openxmlformats.org/presentationml/2006/main" showMasterSp="0" showMasterPhAnim="0">
+  <p:cSld>
     <p:spTree>
       <p:nvGrpSpPr>
         <p:cNvPr id="1" name=""/>
@@ -835,7 +867,9 @@
       <p:sp>
         <p:nvSpPr>
           <p:cNvPr id="1824560760" name="Google Shape;280;g38ac66d765c_6_211:notes"/>
-          <p:cNvSpPr txBox="1"/>
+          <p:cNvSpPr txBox="1">
+            <a:spLocks noGrp="1"/>
+          </p:cNvSpPr>
           <p:nvPr>
             <p:ph type="body" idx="1"/>
           </p:nvPr>
@@ -872,7 +906,9 @@
       <p:sp>
         <p:nvSpPr>
           <p:cNvPr id="1988935013" name="Google Shape;281;g38ac66d765c_6_211:notes"/>
-          <p:cNvSpPr/>
+          <p:cNvSpPr>
+            <a:spLocks noGrp="1" noRot="1" noChangeAspect="1"/>
+          </p:cNvSpPr>
           <p:nvPr>
             <p:ph type="sldImg" idx="2"/>
           </p:nvPr>
@@ -889,7 +925,7 @@
             <a:cxnLst/>
             <a:rect l="l" t="t" r="r" b="b"/>
             <a:pathLst>
-              <a:path w="120000" h="120000" fill="norm" stroke="1" extrusionOk="0">
+              <a:path w="120000" h="120000" extrusionOk="0">
                 <a:moveTo>
                   <a:pt x="0" y="0"/>
                 </a:moveTo>
@@ -910,12 +946,15 @@
       </p:sp>
     </p:spTree>
   </p:cSld>
+  <p:clrMapOvr>
+    <a:masterClrMapping/>
+  </p:clrMapOvr>
 </p:notes>
 </file>
 
 <file path=ppt/notesSlides/notesSlide2.xml><?xml version="1.0" encoding="utf-8"?>
-<p:notes xmlns:a="http://schemas.openxmlformats.org/drawingml/2006/main" xmlns:r="http://schemas.openxmlformats.org/officeDocument/2006/relationships" xmlns:p="http://schemas.openxmlformats.org/presentationml/2006/main" xmlns:m="http://schemas.openxmlformats.org/officeDocument/2006/math" xmlns:w="http://schemas.openxmlformats.org/wordprocessingml/2006/main" showMasterPhAnim="0" showMasterSp="0">
-  <p:cSld name="">
+<p:notes xmlns:a="http://schemas.openxmlformats.org/drawingml/2006/main" xmlns:r="http://schemas.openxmlformats.org/officeDocument/2006/relationships" xmlns:p="http://schemas.openxmlformats.org/presentationml/2006/main" showMasterSp="0" showMasterPhAnim="0">
+  <p:cSld>
     <p:spTree>
       <p:nvGrpSpPr>
         <p:cNvPr id="1" name=""/>
@@ -933,7 +972,9 @@
       <p:sp>
         <p:nvSpPr>
           <p:cNvPr id="608433434" name="Google Shape;204;g38ac66d765c_6_159:notes"/>
-          <p:cNvSpPr txBox="1"/>
+          <p:cNvSpPr txBox="1">
+            <a:spLocks noGrp="1"/>
+          </p:cNvSpPr>
           <p:nvPr>
             <p:ph type="body" idx="1"/>
           </p:nvPr>
@@ -970,7 +1011,9 @@
       <p:sp>
         <p:nvSpPr>
           <p:cNvPr id="647195779" name="Google Shape;205;g38ac66d765c_6_159:notes"/>
-          <p:cNvSpPr/>
+          <p:cNvSpPr>
+            <a:spLocks noGrp="1" noRot="1" noChangeAspect="1"/>
+          </p:cNvSpPr>
           <p:nvPr>
             <p:ph type="sldImg" idx="2"/>
           </p:nvPr>
@@ -987,7 +1030,7 @@
             <a:cxnLst/>
             <a:rect l="l" t="t" r="r" b="b"/>
             <a:pathLst>
-              <a:path w="120000" h="120000" fill="norm" stroke="1" extrusionOk="0">
+              <a:path w="120000" h="120000" extrusionOk="0">
                 <a:moveTo>
                   <a:pt x="0" y="0"/>
                 </a:moveTo>
@@ -1008,12 +1051,15 @@
       </p:sp>
     </p:spTree>
   </p:cSld>
+  <p:clrMapOvr>
+    <a:masterClrMapping/>
+  </p:clrMapOvr>
 </p:notes>
 </file>
 
 <file path=ppt/notesSlides/notesSlide3.xml><?xml version="1.0" encoding="utf-8"?>
-<p:notes xmlns:a="http://schemas.openxmlformats.org/drawingml/2006/main" xmlns:r="http://schemas.openxmlformats.org/officeDocument/2006/relationships" xmlns:p="http://schemas.openxmlformats.org/presentationml/2006/main" xmlns:m="http://schemas.openxmlformats.org/officeDocument/2006/math" xmlns:w="http://schemas.openxmlformats.org/wordprocessingml/2006/main" showMasterPhAnim="0" showMasterSp="0">
-  <p:cSld name="">
+<p:notes xmlns:a="http://schemas.openxmlformats.org/drawingml/2006/main" xmlns:r="http://schemas.openxmlformats.org/officeDocument/2006/relationships" xmlns:p="http://schemas.openxmlformats.org/presentationml/2006/main" showMasterSp="0" showMasterPhAnim="0">
+  <p:cSld>
     <p:spTree>
       <p:nvGrpSpPr>
         <p:cNvPr id="1" name=""/>
@@ -1031,7 +1077,9 @@
       <p:sp>
         <p:nvSpPr>
           <p:cNvPr id="1208325861" name="Google Shape;212;g38ac66d765c_6_139:notes"/>
-          <p:cNvSpPr txBox="1"/>
+          <p:cNvSpPr txBox="1">
+            <a:spLocks noGrp="1"/>
+          </p:cNvSpPr>
           <p:nvPr>
             <p:ph type="body" idx="1"/>
           </p:nvPr>
@@ -1068,7 +1116,9 @@
       <p:sp>
         <p:nvSpPr>
           <p:cNvPr id="1674828436" name="Google Shape;213;g38ac66d765c_6_139:notes"/>
-          <p:cNvSpPr/>
+          <p:cNvSpPr>
+            <a:spLocks noGrp="1" noRot="1" noChangeAspect="1"/>
+          </p:cNvSpPr>
           <p:nvPr>
             <p:ph type="sldImg" idx="2"/>
           </p:nvPr>
@@ -1085,7 +1135,7 @@
             <a:cxnLst/>
             <a:rect l="l" t="t" r="r" b="b"/>
             <a:pathLst>
-              <a:path w="120000" h="120000" fill="norm" stroke="1" extrusionOk="0">
+              <a:path w="120000" h="120000" extrusionOk="0">
                 <a:moveTo>
                   <a:pt x="0" y="0"/>
                 </a:moveTo>
@@ -1106,12 +1156,15 @@
       </p:sp>
     </p:spTree>
   </p:cSld>
+  <p:clrMapOvr>
+    <a:masterClrMapping/>
+  </p:clrMapOvr>
 </p:notes>
 </file>
 
 <file path=ppt/notesSlides/notesSlide4.xml><?xml version="1.0" encoding="utf-8"?>
-<p:notes xmlns:a="http://schemas.openxmlformats.org/drawingml/2006/main" xmlns:r="http://schemas.openxmlformats.org/officeDocument/2006/relationships" xmlns:p="http://schemas.openxmlformats.org/presentationml/2006/main" xmlns:m="http://schemas.openxmlformats.org/officeDocument/2006/math" xmlns:w="http://schemas.openxmlformats.org/wordprocessingml/2006/main" showMasterPhAnim="0" showMasterSp="0">
-  <p:cSld name="">
+<p:notes xmlns:a="http://schemas.openxmlformats.org/drawingml/2006/main" xmlns:r="http://schemas.openxmlformats.org/officeDocument/2006/relationships" xmlns:p="http://schemas.openxmlformats.org/presentationml/2006/main" showMasterSp="0" showMasterPhAnim="0">
+  <p:cSld>
     <p:spTree>
       <p:nvGrpSpPr>
         <p:cNvPr id="1" name=""/>
@@ -1129,7 +1182,9 @@
       <p:sp>
         <p:nvSpPr>
           <p:cNvPr id="1607380348" name="Google Shape;222;g38ac66d765c_6_154:notes"/>
-          <p:cNvSpPr txBox="1"/>
+          <p:cNvSpPr txBox="1">
+            <a:spLocks noGrp="1"/>
+          </p:cNvSpPr>
           <p:nvPr>
             <p:ph type="body" idx="1"/>
           </p:nvPr>
@@ -1166,7 +1221,9 @@
       <p:sp>
         <p:nvSpPr>
           <p:cNvPr id="137398597" name="Google Shape;223;g38ac66d765c_6_154:notes"/>
-          <p:cNvSpPr/>
+          <p:cNvSpPr>
+            <a:spLocks noGrp="1" noRot="1" noChangeAspect="1"/>
+          </p:cNvSpPr>
           <p:nvPr>
             <p:ph type="sldImg" idx="2"/>
           </p:nvPr>
@@ -1183,7 +1240,7 @@
             <a:cxnLst/>
             <a:rect l="l" t="t" r="r" b="b"/>
             <a:pathLst>
-              <a:path w="120000" h="120000" fill="norm" stroke="1" extrusionOk="0">
+              <a:path w="120000" h="120000" extrusionOk="0">
                 <a:moveTo>
                   <a:pt x="0" y="0"/>
                 </a:moveTo>
@@ -1204,12 +1261,15 @@
       </p:sp>
     </p:spTree>
   </p:cSld>
+  <p:clrMapOvr>
+    <a:masterClrMapping/>
+  </p:clrMapOvr>
 </p:notes>
 </file>
 
 <file path=ppt/notesSlides/notesSlide5.xml><?xml version="1.0" encoding="utf-8"?>
-<p:notes xmlns:a="http://schemas.openxmlformats.org/drawingml/2006/main" xmlns:r="http://schemas.openxmlformats.org/officeDocument/2006/relationships" xmlns:p="http://schemas.openxmlformats.org/presentationml/2006/main" xmlns:m="http://schemas.openxmlformats.org/officeDocument/2006/math" xmlns:w="http://schemas.openxmlformats.org/wordprocessingml/2006/main" showMasterPhAnim="0" showMasterSp="0">
-  <p:cSld name="">
+<p:notes xmlns:a="http://schemas.openxmlformats.org/drawingml/2006/main" xmlns:r="http://schemas.openxmlformats.org/officeDocument/2006/relationships" xmlns:p="http://schemas.openxmlformats.org/presentationml/2006/main" showMasterSp="0" showMasterPhAnim="0">
+  <p:cSld>
     <p:spTree>
       <p:nvGrpSpPr>
         <p:cNvPr id="1" name=""/>
@@ -1227,7 +1287,9 @@
       <p:sp>
         <p:nvSpPr>
           <p:cNvPr id="1197756372" name="Google Shape;236;g38ad8432639_2_18:notes"/>
-          <p:cNvSpPr/>
+          <p:cNvSpPr>
+            <a:spLocks noGrp="1" noRot="1" noChangeAspect="1"/>
+          </p:cNvSpPr>
           <p:nvPr>
             <p:ph type="sldImg" idx="2"/>
           </p:nvPr>
@@ -1244,7 +1306,7 @@
             <a:cxnLst/>
             <a:rect l="l" t="t" r="r" b="b"/>
             <a:pathLst>
-              <a:path w="120000" h="120000" fill="norm" stroke="1" extrusionOk="0">
+              <a:path w="120000" h="120000" extrusionOk="0">
                 <a:moveTo>
                   <a:pt x="0" y="0"/>
                 </a:moveTo>
@@ -1266,7 +1328,9 @@
       <p:sp>
         <p:nvSpPr>
           <p:cNvPr id="2011557165" name="Google Shape;237;g38ad8432639_2_18:notes"/>
-          <p:cNvSpPr txBox="1"/>
+          <p:cNvSpPr txBox="1">
+            <a:spLocks noGrp="1"/>
+          </p:cNvSpPr>
           <p:nvPr>
             <p:ph type="body" idx="1"/>
           </p:nvPr>
@@ -1302,12 +1366,15 @@
       </p:sp>
     </p:spTree>
   </p:cSld>
+  <p:clrMapOvr>
+    <a:masterClrMapping/>
+  </p:clrMapOvr>
 </p:notes>
 </file>
 
 <file path=ppt/notesSlides/notesSlide6.xml><?xml version="1.0" encoding="utf-8"?>
-<p:notes xmlns:a="http://schemas.openxmlformats.org/drawingml/2006/main" xmlns:r="http://schemas.openxmlformats.org/officeDocument/2006/relationships" xmlns:p="http://schemas.openxmlformats.org/presentationml/2006/main" xmlns:m="http://schemas.openxmlformats.org/officeDocument/2006/math" xmlns:w="http://schemas.openxmlformats.org/wordprocessingml/2006/main" showMasterPhAnim="0" showMasterSp="0">
-  <p:cSld name="">
+<p:notes xmlns:a="http://schemas.openxmlformats.org/drawingml/2006/main" xmlns:r="http://schemas.openxmlformats.org/officeDocument/2006/relationships" xmlns:p="http://schemas.openxmlformats.org/presentationml/2006/main" showMasterSp="0" showMasterPhAnim="0">
+  <p:cSld>
     <p:spTree>
       <p:nvGrpSpPr>
         <p:cNvPr id="1" name=""/>
@@ -1325,7 +1392,9 @@
       <p:sp>
         <p:nvSpPr>
           <p:cNvPr id="1530809738" name="Google Shape;250;g38ac66d765c_6_165:notes"/>
-          <p:cNvSpPr txBox="1"/>
+          <p:cNvSpPr txBox="1">
+            <a:spLocks noGrp="1"/>
+          </p:cNvSpPr>
           <p:nvPr>
             <p:ph type="body" idx="1"/>
           </p:nvPr>
@@ -1362,7 +1431,9 @@
       <p:sp>
         <p:nvSpPr>
           <p:cNvPr id="2011273530" name="Google Shape;251;g38ac66d765c_6_165:notes"/>
-          <p:cNvSpPr/>
+          <p:cNvSpPr>
+            <a:spLocks noGrp="1" noRot="1" noChangeAspect="1"/>
+          </p:cNvSpPr>
           <p:nvPr>
             <p:ph type="sldImg" idx="2"/>
           </p:nvPr>
@@ -1379,7 +1450,7 @@
             <a:cxnLst/>
             <a:rect l="l" t="t" r="r" b="b"/>
             <a:pathLst>
-              <a:path w="120000" h="120000" fill="norm" stroke="1" extrusionOk="0">
+              <a:path w="120000" h="120000" extrusionOk="0">
                 <a:moveTo>
                   <a:pt x="0" y="0"/>
                 </a:moveTo>
@@ -1400,12 +1471,15 @@
       </p:sp>
     </p:spTree>
   </p:cSld>
+  <p:clrMapOvr>
+    <a:masterClrMapping/>
+  </p:clrMapOvr>
 </p:notes>
 </file>
 
 <file path=ppt/notesSlides/notesSlide7.xml><?xml version="1.0" encoding="utf-8"?>
-<p:notes xmlns:a="http://schemas.openxmlformats.org/drawingml/2006/main" xmlns:r="http://schemas.openxmlformats.org/officeDocument/2006/relationships" xmlns:p="http://schemas.openxmlformats.org/presentationml/2006/main" xmlns:m="http://schemas.openxmlformats.org/officeDocument/2006/math" xmlns:w="http://schemas.openxmlformats.org/wordprocessingml/2006/main" showMasterPhAnim="0" showMasterSp="0">
-  <p:cSld name="">
+<p:notes xmlns:a="http://schemas.openxmlformats.org/drawingml/2006/main" xmlns:r="http://schemas.openxmlformats.org/officeDocument/2006/relationships" xmlns:p="http://schemas.openxmlformats.org/presentationml/2006/main" showMasterSp="0" showMasterPhAnim="0">
+  <p:cSld>
     <p:spTree>
       <p:nvGrpSpPr>
         <p:cNvPr id="1" name=""/>
@@ -1423,7 +1497,9 @@
       <p:sp>
         <p:nvSpPr>
           <p:cNvPr id="1004741369" name="Google Shape;265;g38ad8432639_2_0:notes"/>
-          <p:cNvSpPr txBox="1"/>
+          <p:cNvSpPr txBox="1">
+            <a:spLocks noGrp="1"/>
+          </p:cNvSpPr>
           <p:nvPr>
             <p:ph type="body" idx="1"/>
           </p:nvPr>
@@ -1460,7 +1536,9 @@
       <p:sp>
         <p:nvSpPr>
           <p:cNvPr id="115205022" name="Google Shape;266;g38ad8432639_2_0:notes"/>
-          <p:cNvSpPr/>
+          <p:cNvSpPr>
+            <a:spLocks noGrp="1" noRot="1" noChangeAspect="1"/>
+          </p:cNvSpPr>
           <p:nvPr>
             <p:ph type="sldImg" idx="2"/>
           </p:nvPr>
@@ -1477,7 +1555,7 @@
             <a:cxnLst/>
             <a:rect l="l" t="t" r="r" b="b"/>
             <a:pathLst>
-              <a:path w="120000" h="120000" fill="norm" stroke="1" extrusionOk="0">
+              <a:path w="120000" h="120000" extrusionOk="0">
                 <a:moveTo>
                   <a:pt x="0" y="0"/>
                 </a:moveTo>
@@ -1498,12 +1576,15 @@
       </p:sp>
     </p:spTree>
   </p:cSld>
+  <p:clrMapOvr>
+    <a:masterClrMapping/>
+  </p:clrMapOvr>
 </p:notes>
 </file>
 
 <file path=ppt/notesSlides/notesSlide8.xml><?xml version="1.0" encoding="utf-8"?>
-<p:notes xmlns:a="http://schemas.openxmlformats.org/drawingml/2006/main" xmlns:r="http://schemas.openxmlformats.org/officeDocument/2006/relationships" xmlns:p="http://schemas.openxmlformats.org/presentationml/2006/main" xmlns:m="http://schemas.openxmlformats.org/officeDocument/2006/math" xmlns:w="http://schemas.openxmlformats.org/wordprocessingml/2006/main" showMasterPhAnim="0" showMasterSp="0">
-  <p:cSld name="">
+<p:notes xmlns:a="http://schemas.openxmlformats.org/drawingml/2006/main" xmlns:r="http://schemas.openxmlformats.org/officeDocument/2006/relationships" xmlns:p="http://schemas.openxmlformats.org/presentationml/2006/main" showMasterSp="0" showMasterPhAnim="0">
+  <p:cSld>
     <p:spTree>
       <p:nvGrpSpPr>
         <p:cNvPr id="1" name=""/>
@@ -1521,14 +1602,16 @@
       <p:sp>
         <p:nvSpPr>
           <p:cNvPr id="1330479918" name="Google Shape;258;g38ad8432639_1_0:notes"/>
-          <p:cNvSpPr/>
+          <p:cNvSpPr>
+            <a:spLocks noGrp="1" noRot="1" noChangeAspect="1"/>
+          </p:cNvSpPr>
           <p:nvPr>
             <p:ph type="sldImg" idx="2"/>
           </p:nvPr>
         </p:nvSpPr>
         <p:spPr bwMode="auto">
           <a:xfrm>
-            <a:off x="381300" y="685800"/>
+            <a:off x="381000" y="685800"/>
             <a:ext cx="6096000" cy="3429000"/>
           </a:xfrm>
           <a:custGeom>
@@ -1538,7 +1621,7 @@
             <a:cxnLst/>
             <a:rect l="l" t="t" r="r" b="b"/>
             <a:pathLst>
-              <a:path w="120000" h="120000" fill="norm" stroke="1" extrusionOk="0">
+              <a:path w="120000" h="120000" extrusionOk="0">
                 <a:moveTo>
                   <a:pt x="0" y="0"/>
                 </a:moveTo>
@@ -1560,7 +1643,9 @@
       <p:sp>
         <p:nvSpPr>
           <p:cNvPr id="1892411320" name="Google Shape;259;g38ad8432639_1_0:notes"/>
-          <p:cNvSpPr txBox="1"/>
+          <p:cNvSpPr txBox="1">
+            <a:spLocks noGrp="1"/>
+          </p:cNvSpPr>
           <p:nvPr>
             <p:ph type="body" idx="1"/>
           </p:nvPr>
@@ -1596,12 +1681,15 @@
       </p:sp>
     </p:spTree>
   </p:cSld>
+  <p:clrMapOvr>
+    <a:masterClrMapping/>
+  </p:clrMapOvr>
 </p:notes>
 </file>
 
 <file path=ppt/notesSlides/notesSlide9.xml><?xml version="1.0" encoding="utf-8"?>
-<p:notes xmlns:a="http://schemas.openxmlformats.org/drawingml/2006/main" xmlns:r="http://schemas.openxmlformats.org/officeDocument/2006/relationships" xmlns:p="http://schemas.openxmlformats.org/presentationml/2006/main" xmlns:m="http://schemas.openxmlformats.org/officeDocument/2006/math" xmlns:w="http://schemas.openxmlformats.org/wordprocessingml/2006/main" showMasterPhAnim="0" showMasterSp="0">
-  <p:cSld name="">
+<p:notes xmlns:a="http://schemas.openxmlformats.org/drawingml/2006/main" xmlns:r="http://schemas.openxmlformats.org/officeDocument/2006/relationships" xmlns:p="http://schemas.openxmlformats.org/presentationml/2006/main" showMasterSp="0" showMasterPhAnim="0">
+  <p:cSld>
     <p:spTree>
       <p:nvGrpSpPr>
         <p:cNvPr id="1" name=""/>
@@ -1619,7 +1707,9 @@
       <p:sp>
         <p:nvSpPr>
           <p:cNvPr id="1279422278" name="Google Shape;273;g38ad8432639_2_43:notes"/>
-          <p:cNvSpPr/>
+          <p:cNvSpPr>
+            <a:spLocks noGrp="1" noRot="1" noChangeAspect="1"/>
+          </p:cNvSpPr>
           <p:nvPr>
             <p:ph type="sldImg" idx="2"/>
           </p:nvPr>
@@ -1636,7 +1726,7 @@
             <a:cxnLst/>
             <a:rect l="l" t="t" r="r" b="b"/>
             <a:pathLst>
-              <a:path w="120000" h="120000" fill="norm" stroke="1" extrusionOk="0">
+              <a:path w="120000" h="120000" extrusionOk="0">
                 <a:moveTo>
                   <a:pt x="0" y="0"/>
                 </a:moveTo>
@@ -1658,7 +1748,9 @@
       <p:sp>
         <p:nvSpPr>
           <p:cNvPr id="2038253344" name="Google Shape;274;g38ad8432639_2_43:notes"/>
-          <p:cNvSpPr txBox="1"/>
+          <p:cNvSpPr txBox="1">
+            <a:spLocks noGrp="1"/>
+          </p:cNvSpPr>
           <p:nvPr>
             <p:ph type="body" idx="1"/>
           </p:nvPr>
@@ -1694,11 +1786,14 @@
       </p:sp>
     </p:spTree>
   </p:cSld>
+  <p:clrMapOvr>
+    <a:masterClrMapping/>
+  </p:clrMapOvr>
 </p:notes>
 </file>
 
 <file path=ppt/slideLayouts/slideLayout1.xml><?xml version="1.0" encoding="utf-8"?>
-<p:sldLayout xmlns:a="http://schemas.openxmlformats.org/drawingml/2006/main" xmlns:r="http://schemas.openxmlformats.org/officeDocument/2006/relationships" xmlns:p="http://schemas.openxmlformats.org/presentationml/2006/main" xmlns:m="http://schemas.openxmlformats.org/officeDocument/2006/math" xmlns:w="http://schemas.openxmlformats.org/wordprocessingml/2006/main" matchingName="Title slide" preserve="0" showMasterPhAnim="0" showMasterSp="1" type="title" userDrawn="1">
+<p:sldLayout xmlns:a="http://schemas.openxmlformats.org/drawingml/2006/main" xmlns:r="http://schemas.openxmlformats.org/officeDocument/2006/relationships" xmlns:p="http://schemas.openxmlformats.org/presentationml/2006/main" showMasterPhAnim="0" matchingName="Title slide" type="title" userDrawn="1">
   <p:cSld name="TITLE">
     <p:spTree>
       <p:nvGrpSpPr>
@@ -1717,7 +1812,9 @@
       <p:sp>
         <p:nvSpPr>
           <p:cNvPr id="590201920" name="Google Shape;10;p2"/>
-          <p:cNvSpPr txBox="1"/>
+          <p:cNvSpPr txBox="1">
+            <a:spLocks noGrp="1"/>
+          </p:cNvSpPr>
           <p:nvPr>
             <p:ph type="ctrTitle"/>
           </p:nvPr>
@@ -1847,7 +1944,9 @@
       <p:sp>
         <p:nvSpPr>
           <p:cNvPr id="828339115" name="Google Shape;11;p2"/>
-          <p:cNvSpPr txBox="1"/>
+          <p:cNvSpPr txBox="1">
+            <a:spLocks noGrp="1"/>
+          </p:cNvSpPr>
           <p:nvPr>
             <p:ph type="subTitle" idx="1"/>
           </p:nvPr>
@@ -2004,7 +2103,9 @@
       <p:sp>
         <p:nvSpPr>
           <p:cNvPr id="963628184" name="Google Shape;12;p2"/>
-          <p:cNvSpPr txBox="1"/>
+          <p:cNvSpPr txBox="1">
+            <a:spLocks noGrp="1"/>
+          </p:cNvSpPr>
           <p:nvPr>
             <p:ph type="sldNum" idx="12"/>
           </p:nvPr>
@@ -2088,7 +2189,7 @@
 </file>
 
 <file path=ppt/slideLayouts/slideLayout10.xml><?xml version="1.0" encoding="utf-8"?>
-<p:sldLayout xmlns:a="http://schemas.openxmlformats.org/drawingml/2006/main" xmlns:r="http://schemas.openxmlformats.org/officeDocument/2006/relationships" xmlns:p="http://schemas.openxmlformats.org/presentationml/2006/main" xmlns:m="http://schemas.openxmlformats.org/officeDocument/2006/math" xmlns:w="http://schemas.openxmlformats.org/wordprocessingml/2006/main" matchingName="Big number" preserve="0" showMasterPhAnim="0" showMasterSp="1" userDrawn="1">
+<p:sldLayout xmlns:a="http://schemas.openxmlformats.org/drawingml/2006/main" xmlns:r="http://schemas.openxmlformats.org/officeDocument/2006/relationships" xmlns:p="http://schemas.openxmlformats.org/presentationml/2006/main" showMasterPhAnim="0" matchingName="Big number" userDrawn="1">
   <p:cSld name="BIG_NUMBER">
     <p:spTree>
       <p:nvGrpSpPr>
@@ -2107,7 +2208,9 @@
       <p:sp>
         <p:nvSpPr>
           <p:cNvPr id="396010936" name="Google Shape;45;p11"/>
-          <p:cNvSpPr txBox="1"/>
+          <p:cNvSpPr txBox="1">
+            <a:spLocks noGrp="1"/>
+          </p:cNvSpPr>
           <p:nvPr>
             <p:ph type="title" hasCustomPrompt="1"/>
           </p:nvPr>
@@ -2231,17 +2334,17 @@
               <a:defRPr/>
             </a:pPr>
             <a:r>
-              <a:rPr/>
               <a:t>xx%</a:t>
             </a:r>
-            <a:endParaRPr/>
           </a:p>
         </p:txBody>
       </p:sp>
       <p:sp>
         <p:nvSpPr>
           <p:cNvPr id="1388434001" name="Google Shape;46;p11"/>
-          <p:cNvSpPr txBox="1"/>
+          <p:cNvSpPr txBox="1">
+            <a:spLocks noGrp="1"/>
+          </p:cNvSpPr>
           <p:nvPr>
             <p:ph type="body" idx="1"/>
           </p:nvPr>
@@ -2371,7 +2474,9 @@
       <p:sp>
         <p:nvSpPr>
           <p:cNvPr id="359952384" name="Google Shape;47;p11"/>
-          <p:cNvSpPr txBox="1"/>
+          <p:cNvSpPr txBox="1">
+            <a:spLocks noGrp="1"/>
+          </p:cNvSpPr>
           <p:nvPr>
             <p:ph type="sldNum" idx="12"/>
           </p:nvPr>
@@ -2455,7 +2560,7 @@
 </file>
 
 <file path=ppt/slideLayouts/slideLayout11.xml><?xml version="1.0" encoding="utf-8"?>
-<p:sldLayout xmlns:a="http://schemas.openxmlformats.org/drawingml/2006/main" xmlns:r="http://schemas.openxmlformats.org/officeDocument/2006/relationships" xmlns:p="http://schemas.openxmlformats.org/presentationml/2006/main" xmlns:m="http://schemas.openxmlformats.org/officeDocument/2006/math" xmlns:w="http://schemas.openxmlformats.org/wordprocessingml/2006/main" matchingName="Blank" preserve="0" showMasterPhAnim="0" showMasterSp="1" type="blank" userDrawn="1">
+<p:sldLayout xmlns:a="http://schemas.openxmlformats.org/drawingml/2006/main" xmlns:r="http://schemas.openxmlformats.org/officeDocument/2006/relationships" xmlns:p="http://schemas.openxmlformats.org/presentationml/2006/main" showMasterPhAnim="0" matchingName="Blank" type="blank" userDrawn="1">
   <p:cSld name="BLANK">
     <p:spTree>
       <p:nvGrpSpPr>
@@ -2474,7 +2579,9 @@
       <p:sp>
         <p:nvSpPr>
           <p:cNvPr id="1991955940" name="Google Shape;49;p12"/>
-          <p:cNvSpPr txBox="1"/>
+          <p:cNvSpPr txBox="1">
+            <a:spLocks noGrp="1"/>
+          </p:cNvSpPr>
           <p:nvPr>
             <p:ph type="sldNum" idx="12"/>
           </p:nvPr>
@@ -2558,16 +2665,17 @@
 </file>
 
 <file path=ppt/slideLayouts/slideLayout12.xml><?xml version="1.0" encoding="utf-8"?>
-<p:sldLayout xmlns:a="http://schemas.openxmlformats.org/drawingml/2006/main" xmlns:r="http://schemas.openxmlformats.org/officeDocument/2006/relationships" xmlns:p="http://schemas.openxmlformats.org/presentationml/2006/main" xmlns:m="http://schemas.openxmlformats.org/officeDocument/2006/math" xmlns:w="http://schemas.openxmlformats.org/wordprocessingml/2006/main" matchingName="1_Title Slide" preserve="0" showMasterPhAnim="0" showMasterSp="1" userDrawn="1">
+<p:sldLayout xmlns:a="http://schemas.openxmlformats.org/drawingml/2006/main" xmlns:r="http://schemas.openxmlformats.org/officeDocument/2006/relationships" xmlns:p="http://schemas.openxmlformats.org/presentationml/2006/main" showMasterPhAnim="0" matchingName="1_Title Slide" userDrawn="1">
   <p:cSld name="1_Title Slide">
     <p:bg>
-      <p:bgPr shadeToTitle="0">
+      <p:bgPr>
         <a:blipFill>
           <a:blip r:embed="rId2">
             <a:alphaModFix/>
           </a:blip>
           <a:stretch/>
         </a:blipFill>
+        <a:effectLst/>
       </p:bgPr>
     </p:bg>
     <p:spTree>
@@ -2771,7 +2879,9 @@
       <p:sp>
         <p:nvSpPr>
           <p:cNvPr id="1616592153" name="Google Shape;61;p14"/>
-          <p:cNvSpPr txBox="1"/>
+          <p:cNvSpPr txBox="1">
+            <a:spLocks noGrp="1"/>
+          </p:cNvSpPr>
           <p:nvPr>
             <p:ph type="title"/>
           </p:nvPr>
@@ -2913,7 +3023,9 @@
       <p:sp>
         <p:nvSpPr>
           <p:cNvPr id="853459776" name="Google Shape;62;p14"/>
-          <p:cNvSpPr txBox="1"/>
+          <p:cNvSpPr txBox="1">
+            <a:spLocks noGrp="1"/>
+          </p:cNvSpPr>
           <p:nvPr>
             <p:ph type="body" idx="1"/>
           </p:nvPr>
@@ -3079,7 +3191,9 @@
       <p:sp>
         <p:nvSpPr>
           <p:cNvPr id="487921602" name="Google Shape;63;p14"/>
-          <p:cNvSpPr txBox="1"/>
+          <p:cNvSpPr txBox="1">
+            <a:spLocks noGrp="1"/>
+          </p:cNvSpPr>
           <p:nvPr>
             <p:ph type="sldNum" idx="12"/>
           </p:nvPr>
@@ -3163,16 +3277,17 @@
 </file>
 
 <file path=ppt/slideLayouts/slideLayout13.xml><?xml version="1.0" encoding="utf-8"?>
-<p:sldLayout xmlns:a="http://schemas.openxmlformats.org/drawingml/2006/main" xmlns:r="http://schemas.openxmlformats.org/officeDocument/2006/relationships" xmlns:p="http://schemas.openxmlformats.org/presentationml/2006/main" xmlns:m="http://schemas.openxmlformats.org/officeDocument/2006/math" xmlns:w="http://schemas.openxmlformats.org/wordprocessingml/2006/main" matchingName="3_Custom Layout" preserve="0" showMasterPhAnim="0" showMasterSp="1" userDrawn="1">
+<p:sldLayout xmlns:a="http://schemas.openxmlformats.org/drawingml/2006/main" xmlns:r="http://schemas.openxmlformats.org/officeDocument/2006/relationships" xmlns:p="http://schemas.openxmlformats.org/presentationml/2006/main" showMasterPhAnim="0" matchingName="3_Custom Layout" userDrawn="1">
   <p:cSld name="3_Custom Layout">
     <p:bg>
-      <p:bgPr shadeToTitle="0">
+      <p:bgPr>
         <a:blipFill>
           <a:blip r:embed="rId2">
             <a:alphaModFix/>
           </a:blip>
           <a:stretch/>
         </a:blipFill>
+        <a:effectLst/>
       </p:bgPr>
     </p:bg>
     <p:spTree>
@@ -3192,7 +3307,9 @@
       <p:sp>
         <p:nvSpPr>
           <p:cNvPr id="793781875" name="Google Shape;65;p15"/>
-          <p:cNvSpPr txBox="1"/>
+          <p:cNvSpPr txBox="1">
+            <a:spLocks noGrp="1"/>
+          </p:cNvSpPr>
           <p:nvPr>
             <p:ph type="body" idx="1"/>
           </p:nvPr>
@@ -3358,7 +3475,9 @@
       <p:sp>
         <p:nvSpPr>
           <p:cNvPr id="1393787275" name="Google Shape;66;p15"/>
-          <p:cNvSpPr txBox="1"/>
+          <p:cNvSpPr txBox="1">
+            <a:spLocks noGrp="1"/>
+          </p:cNvSpPr>
           <p:nvPr>
             <p:ph type="title"/>
           </p:nvPr>
@@ -3503,7 +3622,9 @@
       <p:sp>
         <p:nvSpPr>
           <p:cNvPr id="1746024643" name="Google Shape;67;p15"/>
-          <p:cNvSpPr txBox="1"/>
+          <p:cNvSpPr txBox="1">
+            <a:spLocks noGrp="1"/>
+          </p:cNvSpPr>
           <p:nvPr>
             <p:ph type="sldNum" idx="12"/>
           </p:nvPr>
@@ -3587,16 +3708,17 @@
 </file>
 
 <file path=ppt/slideLayouts/slideLayout14.xml><?xml version="1.0" encoding="utf-8"?>
-<p:sldLayout xmlns:a="http://schemas.openxmlformats.org/drawingml/2006/main" xmlns:r="http://schemas.openxmlformats.org/officeDocument/2006/relationships" xmlns:p="http://schemas.openxmlformats.org/presentationml/2006/main" xmlns:m="http://schemas.openxmlformats.org/officeDocument/2006/math" xmlns:w="http://schemas.openxmlformats.org/wordprocessingml/2006/main" matchingName="5_Пользовательский макет" preserve="0" showMasterPhAnim="0" showMasterSp="1" userDrawn="1">
+<p:sldLayout xmlns:a="http://schemas.openxmlformats.org/drawingml/2006/main" xmlns:r="http://schemas.openxmlformats.org/officeDocument/2006/relationships" xmlns:p="http://schemas.openxmlformats.org/presentationml/2006/main" showMasterPhAnim="0" matchingName="5_Пользовательский макет" userDrawn="1">
   <p:cSld name="5_Пользовательский макет">
     <p:bg>
-      <p:bgPr shadeToTitle="0">
+      <p:bgPr>
         <a:blipFill>
           <a:blip r:embed="rId2">
             <a:alphaModFix/>
           </a:blip>
           <a:stretch/>
         </a:blipFill>
+        <a:effectLst/>
       </p:bgPr>
     </p:bg>
     <p:spTree>
@@ -3616,7 +3738,9 @@
       <p:sp>
         <p:nvSpPr>
           <p:cNvPr id="255159513" name="Google Shape;69;p16"/>
-          <p:cNvSpPr/>
+          <p:cNvSpPr>
+            <a:spLocks noGrp="1"/>
+          </p:cNvSpPr>
           <p:nvPr>
             <p:ph type="pic" idx="2"/>
           </p:nvPr>
@@ -3640,7 +3764,9 @@
       <p:sp>
         <p:nvSpPr>
           <p:cNvPr id="998098703" name="Google Shape;70;p16"/>
-          <p:cNvSpPr txBox="1"/>
+          <p:cNvSpPr txBox="1">
+            <a:spLocks noGrp="1"/>
+          </p:cNvSpPr>
           <p:nvPr>
             <p:ph type="title"/>
           </p:nvPr>
@@ -3785,7 +3911,9 @@
       <p:sp>
         <p:nvSpPr>
           <p:cNvPr id="1096066998" name="Google Shape;71;p16"/>
-          <p:cNvSpPr txBox="1"/>
+          <p:cNvSpPr txBox="1">
+            <a:spLocks noGrp="1"/>
+          </p:cNvSpPr>
           <p:nvPr>
             <p:ph type="body" idx="1"/>
           </p:nvPr>
@@ -3947,7 +4075,9 @@
       <p:sp>
         <p:nvSpPr>
           <p:cNvPr id="469320777" name="Google Shape;72;p16"/>
-          <p:cNvSpPr txBox="1"/>
+          <p:cNvSpPr txBox="1">
+            <a:spLocks noGrp="1"/>
+          </p:cNvSpPr>
           <p:nvPr>
             <p:ph type="sldNum" idx="12"/>
           </p:nvPr>
@@ -4031,16 +4161,17 @@
 </file>
 
 <file path=ppt/slideLayouts/slideLayout15.xml><?xml version="1.0" encoding="utf-8"?>
-<p:sldLayout xmlns:a="http://schemas.openxmlformats.org/drawingml/2006/main" xmlns:r="http://schemas.openxmlformats.org/officeDocument/2006/relationships" xmlns:p="http://schemas.openxmlformats.org/presentationml/2006/main" xmlns:m="http://schemas.openxmlformats.org/officeDocument/2006/math" xmlns:w="http://schemas.openxmlformats.org/wordprocessingml/2006/main" matchingName="1_Custom Layout" preserve="0" showMasterPhAnim="0" showMasterSp="1" userDrawn="1">
+<p:sldLayout xmlns:a="http://schemas.openxmlformats.org/drawingml/2006/main" xmlns:r="http://schemas.openxmlformats.org/officeDocument/2006/relationships" xmlns:p="http://schemas.openxmlformats.org/presentationml/2006/main" showMasterPhAnim="0" matchingName="1_Custom Layout" userDrawn="1">
   <p:cSld name="1_Custom Layout">
     <p:bg>
-      <p:bgPr shadeToTitle="0">
+      <p:bgPr>
         <a:blipFill>
           <a:blip r:embed="rId2">
             <a:alphaModFix/>
           </a:blip>
           <a:stretch/>
         </a:blipFill>
+        <a:effectLst/>
       </p:bgPr>
     </p:bg>
     <p:spTree>
@@ -4060,7 +4191,9 @@
       <p:sp>
         <p:nvSpPr>
           <p:cNvPr id="1512357819" name="Google Shape;74;p17"/>
-          <p:cNvSpPr txBox="1"/>
+          <p:cNvSpPr txBox="1">
+            <a:spLocks noGrp="1"/>
+          </p:cNvSpPr>
           <p:nvPr>
             <p:ph type="body" idx="1"/>
           </p:nvPr>
@@ -4222,7 +4355,9 @@
       <p:sp>
         <p:nvSpPr>
           <p:cNvPr id="1212629239" name="Google Shape;75;p17"/>
-          <p:cNvSpPr txBox="1"/>
+          <p:cNvSpPr txBox="1">
+            <a:spLocks noGrp="1"/>
+          </p:cNvSpPr>
           <p:nvPr>
             <p:ph type="body" idx="2"/>
           </p:nvPr>
@@ -4387,7 +4522,9 @@
       <p:sp>
         <p:nvSpPr>
           <p:cNvPr id="1802886017" name="Google Shape;76;p17"/>
-          <p:cNvSpPr txBox="1"/>
+          <p:cNvSpPr txBox="1">
+            <a:spLocks noGrp="1"/>
+          </p:cNvSpPr>
           <p:nvPr>
             <p:ph type="title"/>
           </p:nvPr>
@@ -4532,7 +4669,9 @@
       <p:sp>
         <p:nvSpPr>
           <p:cNvPr id="447806905" name="Google Shape;77;p17"/>
-          <p:cNvSpPr txBox="1"/>
+          <p:cNvSpPr txBox="1">
+            <a:spLocks noGrp="1"/>
+          </p:cNvSpPr>
           <p:nvPr>
             <p:ph type="body" idx="3"/>
           </p:nvPr>
@@ -4694,7 +4833,9 @@
       <p:sp>
         <p:nvSpPr>
           <p:cNvPr id="2123675121" name="Google Shape;78;p17"/>
-          <p:cNvSpPr txBox="1"/>
+          <p:cNvSpPr txBox="1">
+            <a:spLocks noGrp="1"/>
+          </p:cNvSpPr>
           <p:nvPr>
             <p:ph type="body" idx="4"/>
           </p:nvPr>
@@ -4859,7 +5000,9 @@
       <p:sp>
         <p:nvSpPr>
           <p:cNvPr id="71470210" name="Google Shape;79;p17"/>
-          <p:cNvSpPr txBox="1"/>
+          <p:cNvSpPr txBox="1">
+            <a:spLocks noGrp="1"/>
+          </p:cNvSpPr>
           <p:nvPr>
             <p:ph type="sldNum" idx="12"/>
           </p:nvPr>
@@ -4943,16 +5086,17 @@
 </file>
 
 <file path=ppt/slideLayouts/slideLayout16.xml><?xml version="1.0" encoding="utf-8"?>
-<p:sldLayout xmlns:a="http://schemas.openxmlformats.org/drawingml/2006/main" xmlns:r="http://schemas.openxmlformats.org/officeDocument/2006/relationships" xmlns:p="http://schemas.openxmlformats.org/presentationml/2006/main" xmlns:m="http://schemas.openxmlformats.org/officeDocument/2006/math" xmlns:w="http://schemas.openxmlformats.org/wordprocessingml/2006/main" matchingName="9_Пользовательский макет" preserve="0" showMasterPhAnim="0" showMasterSp="1" userDrawn="1">
+<p:sldLayout xmlns:a="http://schemas.openxmlformats.org/drawingml/2006/main" xmlns:r="http://schemas.openxmlformats.org/officeDocument/2006/relationships" xmlns:p="http://schemas.openxmlformats.org/presentationml/2006/main" showMasterPhAnim="0" matchingName="9_Пользовательский макет" userDrawn="1">
   <p:cSld name="9_Пользовательский макет">
     <p:bg>
-      <p:bgPr shadeToTitle="0">
+      <p:bgPr>
         <a:blipFill>
           <a:blip r:embed="rId2">
             <a:alphaModFix/>
           </a:blip>
           <a:stretch/>
         </a:blipFill>
+        <a:effectLst/>
       </p:bgPr>
     </p:bg>
     <p:spTree>
@@ -4972,7 +5116,9 @@
       <p:sp>
         <p:nvSpPr>
           <p:cNvPr id="1422365710" name="Google Shape;81;p18"/>
-          <p:cNvSpPr txBox="1"/>
+          <p:cNvSpPr txBox="1">
+            <a:spLocks noGrp="1"/>
+          </p:cNvSpPr>
           <p:nvPr>
             <p:ph type="body" idx="1"/>
           </p:nvPr>
@@ -5138,7 +5284,9 @@
       <p:sp>
         <p:nvSpPr>
           <p:cNvPr id="398575436" name="Google Shape;82;p18"/>
-          <p:cNvSpPr txBox="1"/>
+          <p:cNvSpPr txBox="1">
+            <a:spLocks noGrp="1"/>
+          </p:cNvSpPr>
           <p:nvPr>
             <p:ph type="body" idx="2"/>
           </p:nvPr>
@@ -5304,7 +5452,9 @@
       <p:sp>
         <p:nvSpPr>
           <p:cNvPr id="1363421662" name="Google Shape;83;p18"/>
-          <p:cNvSpPr txBox="1"/>
+          <p:cNvSpPr txBox="1">
+            <a:spLocks noGrp="1"/>
+          </p:cNvSpPr>
           <p:nvPr>
             <p:ph type="body" idx="3"/>
           </p:nvPr>
@@ -5470,7 +5620,9 @@
       <p:sp>
         <p:nvSpPr>
           <p:cNvPr id="169361438" name="Google Shape;84;p18"/>
-          <p:cNvSpPr txBox="1"/>
+          <p:cNvSpPr txBox="1">
+            <a:spLocks noGrp="1"/>
+          </p:cNvSpPr>
           <p:nvPr>
             <p:ph type="title"/>
           </p:nvPr>
@@ -5612,7 +5764,9 @@
       <p:sp>
         <p:nvSpPr>
           <p:cNvPr id="2088779549" name="Google Shape;85;p18"/>
-          <p:cNvSpPr txBox="1"/>
+          <p:cNvSpPr txBox="1">
+            <a:spLocks noGrp="1"/>
+          </p:cNvSpPr>
           <p:nvPr>
             <p:ph type="sldNum" idx="12"/>
           </p:nvPr>
@@ -5732,16 +5886,17 @@
 </file>
 
 <file path=ppt/slideLayouts/slideLayout17.xml><?xml version="1.0" encoding="utf-8"?>
-<p:sldLayout xmlns:a="http://schemas.openxmlformats.org/drawingml/2006/main" xmlns:r="http://schemas.openxmlformats.org/officeDocument/2006/relationships" xmlns:p="http://schemas.openxmlformats.org/presentationml/2006/main" xmlns:m="http://schemas.openxmlformats.org/officeDocument/2006/math" xmlns:w="http://schemas.openxmlformats.org/wordprocessingml/2006/main" matchingName="Ckfql" preserve="0" showMasterPhAnim="0" showMasterSp="1" userDrawn="1">
+<p:sldLayout xmlns:a="http://schemas.openxmlformats.org/drawingml/2006/main" xmlns:r="http://schemas.openxmlformats.org/officeDocument/2006/relationships" xmlns:p="http://schemas.openxmlformats.org/presentationml/2006/main" showMasterPhAnim="0" matchingName="Ckfql" userDrawn="1">
   <p:cSld name="Ckfql">
     <p:bg>
-      <p:bgPr shadeToTitle="0">
+      <p:bgPr>
         <a:blipFill>
           <a:blip r:embed="rId2">
             <a:alphaModFix/>
           </a:blip>
           <a:stretch/>
         </a:blipFill>
+        <a:effectLst/>
       </p:bgPr>
     </p:bg>
     <p:spTree>
@@ -5761,7 +5916,9 @@
       <p:sp>
         <p:nvSpPr>
           <p:cNvPr id="2115548492" name="Google Shape;87;p19"/>
-          <p:cNvSpPr txBox="1"/>
+          <p:cNvSpPr txBox="1">
+            <a:spLocks noGrp="1"/>
+          </p:cNvSpPr>
           <p:nvPr>
             <p:ph type="title"/>
           </p:nvPr>
@@ -5903,7 +6060,9 @@
       <p:sp>
         <p:nvSpPr>
           <p:cNvPr id="1511366792" name="Google Shape;88;p19"/>
-          <p:cNvSpPr txBox="1"/>
+          <p:cNvSpPr txBox="1">
+            <a:spLocks noGrp="1"/>
+          </p:cNvSpPr>
           <p:nvPr>
             <p:ph type="body" idx="1"/>
           </p:nvPr>
@@ -6065,7 +6224,9 @@
       <p:sp>
         <p:nvSpPr>
           <p:cNvPr id="982401349" name="Google Shape;89;p19"/>
-          <p:cNvSpPr txBox="1"/>
+          <p:cNvSpPr txBox="1">
+            <a:spLocks noGrp="1"/>
+          </p:cNvSpPr>
           <p:nvPr>
             <p:ph type="sldNum" idx="12"/>
           </p:nvPr>
@@ -6149,16 +6310,17 @@
 </file>
 
 <file path=ppt/slideLayouts/slideLayout18.xml><?xml version="1.0" encoding="utf-8"?>
-<p:sldLayout xmlns:a="http://schemas.openxmlformats.org/drawingml/2006/main" xmlns:r="http://schemas.openxmlformats.org/officeDocument/2006/relationships" xmlns:p="http://schemas.openxmlformats.org/presentationml/2006/main" xmlns:m="http://schemas.openxmlformats.org/officeDocument/2006/math" xmlns:w="http://schemas.openxmlformats.org/wordprocessingml/2006/main" matchingName="5_Custom Layout" preserve="0" showMasterPhAnim="0" showMasterSp="1" userDrawn="1">
+<p:sldLayout xmlns:a="http://schemas.openxmlformats.org/drawingml/2006/main" xmlns:r="http://schemas.openxmlformats.org/officeDocument/2006/relationships" xmlns:p="http://schemas.openxmlformats.org/presentationml/2006/main" showMasterPhAnim="0" matchingName="5_Custom Layout" userDrawn="1">
   <p:cSld name="5_Custom Layout">
     <p:bg>
-      <p:bgPr shadeToTitle="0">
+      <p:bgPr>
         <a:blipFill>
           <a:blip r:embed="rId2">
             <a:alphaModFix/>
           </a:blip>
           <a:stretch/>
         </a:blipFill>
+        <a:effectLst/>
       </p:bgPr>
     </p:bg>
     <p:spTree>
@@ -6178,7 +6340,9 @@
       <p:sp>
         <p:nvSpPr>
           <p:cNvPr id="1532594876" name="Google Shape;91;p20"/>
-          <p:cNvSpPr/>
+          <p:cNvSpPr>
+            <a:spLocks noGrp="1"/>
+          </p:cNvSpPr>
           <p:nvPr>
             <p:ph type="pic" idx="2"/>
           </p:nvPr>
@@ -6202,7 +6366,9 @@
       <p:sp>
         <p:nvSpPr>
           <p:cNvPr id="271737403" name="Google Shape;92;p20"/>
-          <p:cNvSpPr txBox="1"/>
+          <p:cNvSpPr txBox="1">
+            <a:spLocks noGrp="1"/>
+          </p:cNvSpPr>
           <p:nvPr>
             <p:ph type="title"/>
           </p:nvPr>
@@ -6344,7 +6510,9 @@
       <p:sp>
         <p:nvSpPr>
           <p:cNvPr id="2011050868" name="Google Shape;93;p20"/>
-          <p:cNvSpPr txBox="1"/>
+          <p:cNvSpPr txBox="1">
+            <a:spLocks noGrp="1"/>
+          </p:cNvSpPr>
           <p:nvPr>
             <p:ph type="body" idx="1"/>
           </p:nvPr>
@@ -6506,7 +6674,9 @@
       <p:sp>
         <p:nvSpPr>
           <p:cNvPr id="1624502267" name="Google Shape;94;p20"/>
-          <p:cNvSpPr txBox="1"/>
+          <p:cNvSpPr txBox="1">
+            <a:spLocks noGrp="1"/>
+          </p:cNvSpPr>
           <p:nvPr>
             <p:ph type="sldNum" idx="12"/>
           </p:nvPr>
@@ -6590,16 +6760,17 @@
 </file>
 
 <file path=ppt/slideLayouts/slideLayout19.xml><?xml version="1.0" encoding="utf-8"?>
-<p:sldLayout xmlns:a="http://schemas.openxmlformats.org/drawingml/2006/main" xmlns:r="http://schemas.openxmlformats.org/officeDocument/2006/relationships" xmlns:p="http://schemas.openxmlformats.org/presentationml/2006/main" xmlns:m="http://schemas.openxmlformats.org/officeDocument/2006/math" xmlns:w="http://schemas.openxmlformats.org/wordprocessingml/2006/main" matchingName="6_Custom Layout" preserve="0" showMasterPhAnim="0" showMasterSp="1" userDrawn="1">
+<p:sldLayout xmlns:a="http://schemas.openxmlformats.org/drawingml/2006/main" xmlns:r="http://schemas.openxmlformats.org/officeDocument/2006/relationships" xmlns:p="http://schemas.openxmlformats.org/presentationml/2006/main" showMasterPhAnim="0" matchingName="6_Custom Layout" userDrawn="1">
   <p:cSld name="6_Custom Layout">
     <p:bg>
-      <p:bgPr shadeToTitle="0">
+      <p:bgPr>
         <a:blipFill>
           <a:blip r:embed="rId2">
             <a:alphaModFix/>
           </a:blip>
           <a:stretch/>
         </a:blipFill>
+        <a:effectLst/>
       </p:bgPr>
     </p:bg>
     <p:spTree>
@@ -6619,7 +6790,9 @@
       <p:sp>
         <p:nvSpPr>
           <p:cNvPr id="8796431" name="Google Shape;96;p21"/>
-          <p:cNvSpPr txBox="1"/>
+          <p:cNvSpPr txBox="1">
+            <a:spLocks noGrp="1"/>
+          </p:cNvSpPr>
           <p:nvPr>
             <p:ph type="title"/>
           </p:nvPr>
@@ -6761,7 +6934,9 @@
       <p:sp>
         <p:nvSpPr>
           <p:cNvPr id="1759417732" name="Google Shape;97;p21"/>
-          <p:cNvSpPr txBox="1"/>
+          <p:cNvSpPr txBox="1">
+            <a:spLocks noGrp="1"/>
+          </p:cNvSpPr>
           <p:nvPr>
             <p:ph type="body" idx="1"/>
           </p:nvPr>
@@ -6923,7 +7098,9 @@
       <p:sp>
         <p:nvSpPr>
           <p:cNvPr id="583148242" name="Google Shape;98;p21"/>
-          <p:cNvSpPr/>
+          <p:cNvSpPr>
+            <a:spLocks noGrp="1"/>
+          </p:cNvSpPr>
           <p:nvPr>
             <p:ph type="pic" idx="2"/>
           </p:nvPr>
@@ -6947,7 +7124,9 @@
       <p:sp>
         <p:nvSpPr>
           <p:cNvPr id="946223607" name="Google Shape;99;p21"/>
-          <p:cNvSpPr/>
+          <p:cNvSpPr>
+            <a:spLocks noGrp="1"/>
+          </p:cNvSpPr>
           <p:nvPr>
             <p:ph type="pic" idx="3"/>
           </p:nvPr>
@@ -6971,7 +7150,9 @@
       <p:sp>
         <p:nvSpPr>
           <p:cNvPr id="510282510" name="Google Shape;100;p21"/>
-          <p:cNvSpPr txBox="1"/>
+          <p:cNvSpPr txBox="1">
+            <a:spLocks noGrp="1"/>
+          </p:cNvSpPr>
           <p:nvPr>
             <p:ph type="sldNum" idx="12"/>
           </p:nvPr>
@@ -7055,7 +7236,7 @@
 </file>
 
 <file path=ppt/slideLayouts/slideLayout2.xml><?xml version="1.0" encoding="utf-8"?>
-<p:sldLayout xmlns:a="http://schemas.openxmlformats.org/drawingml/2006/main" xmlns:r="http://schemas.openxmlformats.org/officeDocument/2006/relationships" xmlns:p="http://schemas.openxmlformats.org/presentationml/2006/main" xmlns:m="http://schemas.openxmlformats.org/officeDocument/2006/math" xmlns:w="http://schemas.openxmlformats.org/wordprocessingml/2006/main" matchingName="Section header" preserve="0" showMasterPhAnim="0" showMasterSp="1" type="secHead" userDrawn="1">
+<p:sldLayout xmlns:a="http://schemas.openxmlformats.org/drawingml/2006/main" xmlns:r="http://schemas.openxmlformats.org/officeDocument/2006/relationships" xmlns:p="http://schemas.openxmlformats.org/presentationml/2006/main" showMasterPhAnim="0" matchingName="Section header" type="secHead" userDrawn="1">
   <p:cSld name="SECTION_HEADER">
     <p:spTree>
       <p:nvGrpSpPr>
@@ -7074,7 +7255,9 @@
       <p:sp>
         <p:nvSpPr>
           <p:cNvPr id="397304918" name="Google Shape;14;p3"/>
-          <p:cNvSpPr txBox="1"/>
+          <p:cNvSpPr txBox="1">
+            <a:spLocks noGrp="1"/>
+          </p:cNvSpPr>
           <p:nvPr>
             <p:ph type="title"/>
           </p:nvPr>
@@ -7204,7 +7387,9 @@
       <p:sp>
         <p:nvSpPr>
           <p:cNvPr id="1902547717" name="Google Shape;15;p3"/>
-          <p:cNvSpPr txBox="1"/>
+          <p:cNvSpPr txBox="1">
+            <a:spLocks noGrp="1"/>
+          </p:cNvSpPr>
           <p:nvPr>
             <p:ph type="sldNum" idx="12"/>
           </p:nvPr>
@@ -7288,16 +7473,17 @@
 </file>
 
 <file path=ppt/slideLayouts/slideLayout20.xml><?xml version="1.0" encoding="utf-8"?>
-<p:sldLayout xmlns:a="http://schemas.openxmlformats.org/drawingml/2006/main" xmlns:r="http://schemas.openxmlformats.org/officeDocument/2006/relationships" xmlns:p="http://schemas.openxmlformats.org/presentationml/2006/main" xmlns:m="http://schemas.openxmlformats.org/officeDocument/2006/math" xmlns:w="http://schemas.openxmlformats.org/wordprocessingml/2006/main" matchingName="4_Custom Layout" preserve="0" showMasterPhAnim="0" showMasterSp="1" userDrawn="1">
+<p:sldLayout xmlns:a="http://schemas.openxmlformats.org/drawingml/2006/main" xmlns:r="http://schemas.openxmlformats.org/officeDocument/2006/relationships" xmlns:p="http://schemas.openxmlformats.org/presentationml/2006/main" showMasterPhAnim="0" matchingName="4_Custom Layout" userDrawn="1">
   <p:cSld name="4_Custom Layout">
     <p:bg>
-      <p:bgPr shadeToTitle="0">
+      <p:bgPr>
         <a:blipFill>
           <a:blip r:embed="rId2">
             <a:alphaModFix/>
           </a:blip>
           <a:stretch/>
         </a:blipFill>
+        <a:effectLst/>
       </p:bgPr>
     </p:bg>
     <p:spTree>
@@ -7317,7 +7503,9 @@
       <p:sp>
         <p:nvSpPr>
           <p:cNvPr id="383043009" name="Google Shape;102;p22"/>
-          <p:cNvSpPr txBox="1"/>
+          <p:cNvSpPr txBox="1">
+            <a:spLocks noGrp="1"/>
+          </p:cNvSpPr>
           <p:nvPr>
             <p:ph type="body" idx="1"/>
           </p:nvPr>
@@ -7479,7 +7667,9 @@
       <p:sp>
         <p:nvSpPr>
           <p:cNvPr id="1973776679" name="Google Shape;103;p22"/>
-          <p:cNvSpPr txBox="1"/>
+          <p:cNvSpPr txBox="1">
+            <a:spLocks noGrp="1"/>
+          </p:cNvSpPr>
           <p:nvPr>
             <p:ph type="body" idx="2"/>
           </p:nvPr>
@@ -7641,7 +7831,9 @@
       <p:sp>
         <p:nvSpPr>
           <p:cNvPr id="393570675" name="Google Shape;104;p22"/>
-          <p:cNvSpPr txBox="1"/>
+          <p:cNvSpPr txBox="1">
+            <a:spLocks noGrp="1"/>
+          </p:cNvSpPr>
           <p:nvPr>
             <p:ph type="body" idx="3"/>
           </p:nvPr>
@@ -7803,7 +7995,9 @@
       <p:sp>
         <p:nvSpPr>
           <p:cNvPr id="2076694133" name="Google Shape;105;p22"/>
-          <p:cNvSpPr txBox="1"/>
+          <p:cNvSpPr txBox="1">
+            <a:spLocks noGrp="1"/>
+          </p:cNvSpPr>
           <p:nvPr>
             <p:ph type="body" idx="4"/>
           </p:nvPr>
@@ -7964,7 +8158,9 @@
       <p:sp>
         <p:nvSpPr>
           <p:cNvPr id="964045558" name="Google Shape;106;p22"/>
-          <p:cNvSpPr txBox="1"/>
+          <p:cNvSpPr txBox="1">
+            <a:spLocks noGrp="1"/>
+          </p:cNvSpPr>
           <p:nvPr>
             <p:ph type="body" idx="5"/>
           </p:nvPr>
@@ -8125,7 +8321,9 @@
       <p:sp>
         <p:nvSpPr>
           <p:cNvPr id="652076326" name="Google Shape;107;p22"/>
-          <p:cNvSpPr txBox="1"/>
+          <p:cNvSpPr txBox="1">
+            <a:spLocks noGrp="1"/>
+          </p:cNvSpPr>
           <p:nvPr>
             <p:ph type="title"/>
           </p:nvPr>
@@ -8267,7 +8465,9 @@
       <p:sp>
         <p:nvSpPr>
           <p:cNvPr id="313820855" name="Google Shape;108;p22"/>
-          <p:cNvSpPr txBox="1"/>
+          <p:cNvSpPr txBox="1">
+            <a:spLocks noGrp="1"/>
+          </p:cNvSpPr>
           <p:nvPr>
             <p:ph type="body" idx="6"/>
           </p:nvPr>
@@ -8428,7 +8628,9 @@
       <p:sp>
         <p:nvSpPr>
           <p:cNvPr id="785636044" name="Google Shape;109;p22"/>
-          <p:cNvSpPr/>
+          <p:cNvSpPr>
+            <a:spLocks noGrp="1"/>
+          </p:cNvSpPr>
           <p:nvPr>
             <p:ph type="pic" idx="7"/>
           </p:nvPr>
@@ -8452,7 +8654,9 @@
       <p:sp>
         <p:nvSpPr>
           <p:cNvPr id="555269125" name="Google Shape;110;p22"/>
-          <p:cNvSpPr/>
+          <p:cNvSpPr>
+            <a:spLocks noGrp="1"/>
+          </p:cNvSpPr>
           <p:nvPr>
             <p:ph type="pic" idx="8"/>
           </p:nvPr>
@@ -8476,7 +8680,9 @@
       <p:sp>
         <p:nvSpPr>
           <p:cNvPr id="1071928" name="Google Shape;111;p22"/>
-          <p:cNvSpPr/>
+          <p:cNvSpPr>
+            <a:spLocks noGrp="1"/>
+          </p:cNvSpPr>
           <p:nvPr>
             <p:ph type="pic" idx="9"/>
           </p:nvPr>
@@ -8500,7 +8706,9 @@
       <p:sp>
         <p:nvSpPr>
           <p:cNvPr id="1226832326" name="Google Shape;112;p22"/>
-          <p:cNvSpPr txBox="1"/>
+          <p:cNvSpPr txBox="1">
+            <a:spLocks noGrp="1"/>
+          </p:cNvSpPr>
           <p:nvPr>
             <p:ph type="sldNum" idx="12"/>
           </p:nvPr>
@@ -8584,16 +8792,17 @@
 </file>
 
 <file path=ppt/slideLayouts/slideLayout21.xml><?xml version="1.0" encoding="utf-8"?>
-<p:sldLayout xmlns:a="http://schemas.openxmlformats.org/drawingml/2006/main" xmlns:r="http://schemas.openxmlformats.org/officeDocument/2006/relationships" xmlns:p="http://schemas.openxmlformats.org/presentationml/2006/main" xmlns:m="http://schemas.openxmlformats.org/officeDocument/2006/math" xmlns:w="http://schemas.openxmlformats.org/wordprocessingml/2006/main" matchingName="8_Custom Layout" preserve="0" showMasterPhAnim="0" showMasterSp="1" userDrawn="1">
+<p:sldLayout xmlns:a="http://schemas.openxmlformats.org/drawingml/2006/main" xmlns:r="http://schemas.openxmlformats.org/officeDocument/2006/relationships" xmlns:p="http://schemas.openxmlformats.org/presentationml/2006/main" showMasterPhAnim="0" matchingName="8_Custom Layout" userDrawn="1">
   <p:cSld name="8_Custom Layout">
     <p:bg>
-      <p:bgPr shadeToTitle="0">
+      <p:bgPr>
         <a:blipFill>
           <a:blip r:embed="rId2">
             <a:alphaModFix/>
           </a:blip>
           <a:stretch/>
         </a:blipFill>
+        <a:effectLst/>
       </p:bgPr>
     </p:bg>
     <p:spTree>
@@ -8613,7 +8822,9 @@
       <p:sp>
         <p:nvSpPr>
           <p:cNvPr id="1391453380" name="Google Shape;114;p23"/>
-          <p:cNvSpPr txBox="1"/>
+          <p:cNvSpPr txBox="1">
+            <a:spLocks noGrp="1"/>
+          </p:cNvSpPr>
           <p:nvPr>
             <p:ph type="title"/>
           </p:nvPr>
@@ -8755,7 +8966,9 @@
       <p:sp>
         <p:nvSpPr>
           <p:cNvPr id="970793182" name="Google Shape;115;p23"/>
-          <p:cNvSpPr txBox="1"/>
+          <p:cNvSpPr txBox="1">
+            <a:spLocks noGrp="1"/>
+          </p:cNvSpPr>
           <p:nvPr>
             <p:ph type="body" idx="1"/>
           </p:nvPr>
@@ -8917,7 +9130,9 @@
       <p:sp>
         <p:nvSpPr>
           <p:cNvPr id="471835655" name="Google Shape;116;p23"/>
-          <p:cNvSpPr/>
+          <p:cNvSpPr>
+            <a:spLocks noGrp="1"/>
+          </p:cNvSpPr>
           <p:nvPr>
             <p:ph type="pic" idx="2"/>
           </p:nvPr>
@@ -8941,7 +9156,9 @@
       <p:sp>
         <p:nvSpPr>
           <p:cNvPr id="1506227192" name="Google Shape;117;p23"/>
-          <p:cNvSpPr/>
+          <p:cNvSpPr>
+            <a:spLocks noGrp="1"/>
+          </p:cNvSpPr>
           <p:nvPr>
             <p:ph type="pic" idx="3"/>
           </p:nvPr>
@@ -8965,7 +9182,9 @@
       <p:sp>
         <p:nvSpPr>
           <p:cNvPr id="7776767" name="Google Shape;118;p23"/>
-          <p:cNvSpPr/>
+          <p:cNvSpPr>
+            <a:spLocks noGrp="1"/>
+          </p:cNvSpPr>
           <p:nvPr>
             <p:ph type="pic" idx="4"/>
           </p:nvPr>
@@ -8989,7 +9208,9 @@
       <p:sp>
         <p:nvSpPr>
           <p:cNvPr id="1890995763" name="Google Shape;119;p23"/>
-          <p:cNvSpPr/>
+          <p:cNvSpPr>
+            <a:spLocks noGrp="1"/>
+          </p:cNvSpPr>
           <p:nvPr>
             <p:ph type="pic" idx="5"/>
           </p:nvPr>
@@ -9013,7 +9234,9 @@
       <p:sp>
         <p:nvSpPr>
           <p:cNvPr id="1739416506" name="Google Shape;120;p23"/>
-          <p:cNvSpPr/>
+          <p:cNvSpPr>
+            <a:spLocks noGrp="1"/>
+          </p:cNvSpPr>
           <p:nvPr>
             <p:ph type="pic" idx="6"/>
           </p:nvPr>
@@ -9037,7 +9260,9 @@
       <p:sp>
         <p:nvSpPr>
           <p:cNvPr id="543897252" name="Google Shape;121;p23"/>
-          <p:cNvSpPr txBox="1"/>
+          <p:cNvSpPr txBox="1">
+            <a:spLocks noGrp="1"/>
+          </p:cNvSpPr>
           <p:nvPr>
             <p:ph type="sldNum" idx="12"/>
           </p:nvPr>
@@ -9121,16 +9346,17 @@
 </file>
 
 <file path=ppt/slideLayouts/slideLayout22.xml><?xml version="1.0" encoding="utf-8"?>
-<p:sldLayout xmlns:a="http://schemas.openxmlformats.org/drawingml/2006/main" xmlns:r="http://schemas.openxmlformats.org/officeDocument/2006/relationships" xmlns:p="http://schemas.openxmlformats.org/presentationml/2006/main" xmlns:m="http://schemas.openxmlformats.org/officeDocument/2006/math" xmlns:w="http://schemas.openxmlformats.org/wordprocessingml/2006/main" matchingName="10_Custom Layout" preserve="0" showMasterPhAnim="0" showMasterSp="1" userDrawn="1">
+<p:sldLayout xmlns:a="http://schemas.openxmlformats.org/drawingml/2006/main" xmlns:r="http://schemas.openxmlformats.org/officeDocument/2006/relationships" xmlns:p="http://schemas.openxmlformats.org/presentationml/2006/main" showMasterPhAnim="0" matchingName="10_Custom Layout" userDrawn="1">
   <p:cSld name="10_Custom Layout">
     <p:bg>
-      <p:bgPr shadeToTitle="0">
+      <p:bgPr>
         <a:blipFill>
           <a:blip r:embed="rId2">
             <a:alphaModFix/>
           </a:blip>
           <a:stretch/>
         </a:blipFill>
+        <a:effectLst/>
       </p:bgPr>
     </p:bg>
     <p:spTree>
@@ -9150,7 +9376,9 @@
       <p:sp>
         <p:nvSpPr>
           <p:cNvPr id="2106474749" name="Google Shape;123;p24"/>
-          <p:cNvSpPr txBox="1"/>
+          <p:cNvSpPr txBox="1">
+            <a:spLocks noGrp="1"/>
+          </p:cNvSpPr>
           <p:nvPr>
             <p:ph type="body" idx="1"/>
           </p:nvPr>
@@ -9312,7 +9540,9 @@
       <p:sp>
         <p:nvSpPr>
           <p:cNvPr id="839464797" name="Google Shape;124;p24"/>
-          <p:cNvSpPr txBox="1"/>
+          <p:cNvSpPr txBox="1">
+            <a:spLocks noGrp="1"/>
+          </p:cNvSpPr>
           <p:nvPr>
             <p:ph type="body" idx="2"/>
           </p:nvPr>
@@ -9474,7 +9704,9 @@
       <p:sp>
         <p:nvSpPr>
           <p:cNvPr id="1545677784" name="Google Shape;125;p24"/>
-          <p:cNvSpPr txBox="1"/>
+          <p:cNvSpPr txBox="1">
+            <a:spLocks noGrp="1"/>
+          </p:cNvSpPr>
           <p:nvPr>
             <p:ph type="body" idx="3"/>
           </p:nvPr>
@@ -9636,7 +9868,9 @@
       <p:sp>
         <p:nvSpPr>
           <p:cNvPr id="1351863568" name="Google Shape;126;p24"/>
-          <p:cNvSpPr txBox="1"/>
+          <p:cNvSpPr txBox="1">
+            <a:spLocks noGrp="1"/>
+          </p:cNvSpPr>
           <p:nvPr>
             <p:ph type="title"/>
           </p:nvPr>
@@ -9778,7 +10012,9 @@
       <p:sp>
         <p:nvSpPr>
           <p:cNvPr id="847848885" name="Google Shape;127;p24"/>
-          <p:cNvSpPr/>
+          <p:cNvSpPr>
+            <a:spLocks noGrp="1"/>
+          </p:cNvSpPr>
           <p:nvPr>
             <p:ph type="pic" idx="4"/>
           </p:nvPr>
@@ -9802,7 +10038,9 @@
       <p:sp>
         <p:nvSpPr>
           <p:cNvPr id="1429002599" name="Google Shape;128;p24"/>
-          <p:cNvSpPr/>
+          <p:cNvSpPr>
+            <a:spLocks noGrp="1"/>
+          </p:cNvSpPr>
           <p:nvPr>
             <p:ph type="pic" idx="5"/>
           </p:nvPr>
@@ -9826,7 +10064,9 @@
       <p:sp>
         <p:nvSpPr>
           <p:cNvPr id="1642711980" name="Google Shape;129;p24"/>
-          <p:cNvSpPr/>
+          <p:cNvSpPr>
+            <a:spLocks noGrp="1"/>
+          </p:cNvSpPr>
           <p:nvPr>
             <p:ph type="pic" idx="6"/>
           </p:nvPr>
@@ -9850,7 +10090,9 @@
       <p:sp>
         <p:nvSpPr>
           <p:cNvPr id="1757834183" name="Google Shape;130;p24"/>
-          <p:cNvSpPr txBox="1"/>
+          <p:cNvSpPr txBox="1">
+            <a:spLocks noGrp="1"/>
+          </p:cNvSpPr>
           <p:nvPr>
             <p:ph type="body" idx="7"/>
           </p:nvPr>
@@ -10012,7 +10254,9 @@
       <p:sp>
         <p:nvSpPr>
           <p:cNvPr id="209815942" name="Google Shape;131;p24"/>
-          <p:cNvSpPr txBox="1"/>
+          <p:cNvSpPr txBox="1">
+            <a:spLocks noGrp="1"/>
+          </p:cNvSpPr>
           <p:nvPr>
             <p:ph type="body" idx="8"/>
           </p:nvPr>
@@ -10174,7 +10418,9 @@
       <p:sp>
         <p:nvSpPr>
           <p:cNvPr id="1191711475" name="Google Shape;132;p24"/>
-          <p:cNvSpPr txBox="1"/>
+          <p:cNvSpPr txBox="1">
+            <a:spLocks noGrp="1"/>
+          </p:cNvSpPr>
           <p:nvPr>
             <p:ph type="body" idx="9"/>
           </p:nvPr>
@@ -10336,7 +10582,9 @@
       <p:sp>
         <p:nvSpPr>
           <p:cNvPr id="716902739" name="Google Shape;133;p24"/>
-          <p:cNvSpPr/>
+          <p:cNvSpPr>
+            <a:spLocks noGrp="1"/>
+          </p:cNvSpPr>
           <p:nvPr>
             <p:ph type="pic" idx="13"/>
           </p:nvPr>
@@ -10360,7 +10608,9 @@
       <p:sp>
         <p:nvSpPr>
           <p:cNvPr id="964398278" name="Google Shape;134;p24"/>
-          <p:cNvSpPr/>
+          <p:cNvSpPr>
+            <a:spLocks noGrp="1"/>
+          </p:cNvSpPr>
           <p:nvPr>
             <p:ph type="pic" idx="14"/>
           </p:nvPr>
@@ -10384,7 +10634,9 @@
       <p:sp>
         <p:nvSpPr>
           <p:cNvPr id="1030869932" name="Google Shape;135;p24"/>
-          <p:cNvSpPr/>
+          <p:cNvSpPr>
+            <a:spLocks noGrp="1"/>
+          </p:cNvSpPr>
           <p:nvPr>
             <p:ph type="pic" idx="15"/>
           </p:nvPr>
@@ -10408,7 +10660,9 @@
       <p:sp>
         <p:nvSpPr>
           <p:cNvPr id="185926578" name="Google Shape;136;p24"/>
-          <p:cNvSpPr txBox="1"/>
+          <p:cNvSpPr txBox="1">
+            <a:spLocks noGrp="1"/>
+          </p:cNvSpPr>
           <p:nvPr>
             <p:ph type="sldNum" idx="12"/>
           </p:nvPr>
@@ -10492,16 +10746,17 @@
 </file>
 
 <file path=ppt/slideLayouts/slideLayout23.xml><?xml version="1.0" encoding="utf-8"?>
-<p:sldLayout xmlns:a="http://schemas.openxmlformats.org/drawingml/2006/main" xmlns:r="http://schemas.openxmlformats.org/officeDocument/2006/relationships" xmlns:p="http://schemas.openxmlformats.org/presentationml/2006/main" xmlns:m="http://schemas.openxmlformats.org/officeDocument/2006/math" xmlns:w="http://schemas.openxmlformats.org/wordprocessingml/2006/main" matchingName="Финал" preserve="0" showMasterPhAnim="0" showMasterSp="1" userDrawn="1">
+<p:sldLayout xmlns:a="http://schemas.openxmlformats.org/drawingml/2006/main" xmlns:r="http://schemas.openxmlformats.org/officeDocument/2006/relationships" xmlns:p="http://schemas.openxmlformats.org/presentationml/2006/main" showMasterPhAnim="0" matchingName="Финал" userDrawn="1">
   <p:cSld name="Финал">
     <p:bg>
-      <p:bgPr shadeToTitle="0">
+      <p:bgPr>
         <a:blipFill>
           <a:blip r:embed="rId2">
             <a:alphaModFix/>
           </a:blip>
           <a:stretch/>
         </a:blipFill>
+        <a:effectLst/>
       </p:bgPr>
     </p:bg>
     <p:spTree>
@@ -10521,7 +10776,9 @@
       <p:sp>
         <p:nvSpPr>
           <p:cNvPr id="2095056598" name="Google Shape;138;p25"/>
-          <p:cNvSpPr txBox="1"/>
+          <p:cNvSpPr txBox="1">
+            <a:spLocks noGrp="1"/>
+          </p:cNvSpPr>
           <p:nvPr>
             <p:ph type="body" idx="1"/>
           </p:nvPr>
@@ -10687,7 +10944,9 @@
       <p:sp>
         <p:nvSpPr>
           <p:cNvPr id="1124318315" name="Google Shape;139;p25"/>
-          <p:cNvSpPr txBox="1"/>
+          <p:cNvSpPr txBox="1">
+            <a:spLocks noGrp="1"/>
+          </p:cNvSpPr>
           <p:nvPr>
             <p:ph type="title"/>
           </p:nvPr>
@@ -10832,7 +11091,9 @@
       <p:sp>
         <p:nvSpPr>
           <p:cNvPr id="781848651" name="Google Shape;140;p25"/>
-          <p:cNvSpPr txBox="1"/>
+          <p:cNvSpPr txBox="1">
+            <a:spLocks noGrp="1"/>
+          </p:cNvSpPr>
           <p:nvPr>
             <p:ph type="sldNum" idx="12"/>
           </p:nvPr>
@@ -10916,13 +11177,14 @@
 </file>
 
 <file path=ppt/slideLayouts/slideLayout24.xml><?xml version="1.0" encoding="utf-8"?>
-<p:sldLayout xmlns:a="http://schemas.openxmlformats.org/drawingml/2006/main" xmlns:r="http://schemas.openxmlformats.org/officeDocument/2006/relationships" xmlns:p="http://schemas.openxmlformats.org/presentationml/2006/main" xmlns:m="http://schemas.openxmlformats.org/officeDocument/2006/math" xmlns:w="http://schemas.openxmlformats.org/wordprocessingml/2006/main" matchingName="Пользовательский макет" preserve="0" showMasterPhAnim="0" showMasterSp="1" userDrawn="1">
+<p:sldLayout xmlns:a="http://schemas.openxmlformats.org/drawingml/2006/main" xmlns:r="http://schemas.openxmlformats.org/officeDocument/2006/relationships" xmlns:p="http://schemas.openxmlformats.org/presentationml/2006/main" showMasterPhAnim="0" matchingName="Пользовательский макет" userDrawn="1">
   <p:cSld name="Пользовательский макет">
     <p:bg>
-      <p:bgPr shadeToTitle="0">
+      <p:bgPr>
         <a:solidFill>
           <a:srgbClr val="FFFFFF"/>
         </a:solidFill>
+        <a:effectLst/>
       </p:bgPr>
     </p:bg>
     <p:spTree>
@@ -10942,7 +11204,9 @@
       <p:sp>
         <p:nvSpPr>
           <p:cNvPr id="580960549" name="Google Shape;142;p26"/>
-          <p:cNvSpPr txBox="1"/>
+          <p:cNvSpPr txBox="1">
+            <a:spLocks noGrp="1"/>
+          </p:cNvSpPr>
           <p:nvPr>
             <p:ph type="body" idx="1"/>
           </p:nvPr>
@@ -11104,7 +11368,9 @@
       <p:sp>
         <p:nvSpPr>
           <p:cNvPr id="1971361968" name="Google Shape;143;p26"/>
-          <p:cNvSpPr txBox="1"/>
+          <p:cNvSpPr txBox="1">
+            <a:spLocks noGrp="1"/>
+          </p:cNvSpPr>
           <p:nvPr>
             <p:ph type="body" idx="2"/>
           </p:nvPr>
@@ -11269,7 +11535,9 @@
       <p:sp>
         <p:nvSpPr>
           <p:cNvPr id="1657008701" name="Google Shape;144;p26"/>
-          <p:cNvSpPr txBox="1"/>
+          <p:cNvSpPr txBox="1">
+            <a:spLocks noGrp="1"/>
+          </p:cNvSpPr>
           <p:nvPr>
             <p:ph type="body" idx="3"/>
           </p:nvPr>
@@ -11431,7 +11699,9 @@
       <p:sp>
         <p:nvSpPr>
           <p:cNvPr id="256956464" name="Google Shape;145;p26"/>
-          <p:cNvSpPr txBox="1"/>
+          <p:cNvSpPr txBox="1">
+            <a:spLocks noGrp="1"/>
+          </p:cNvSpPr>
           <p:nvPr>
             <p:ph type="body" idx="4"/>
           </p:nvPr>
@@ -11596,7 +11866,9 @@
       <p:sp>
         <p:nvSpPr>
           <p:cNvPr id="2022599799" name="Google Shape;146;p26"/>
-          <p:cNvSpPr txBox="1"/>
+          <p:cNvSpPr txBox="1">
+            <a:spLocks noGrp="1"/>
+          </p:cNvSpPr>
           <p:nvPr>
             <p:ph type="title"/>
           </p:nvPr>
@@ -11738,7 +12010,9 @@
       <p:sp>
         <p:nvSpPr>
           <p:cNvPr id="1893891913" name="Google Shape;147;p26"/>
-          <p:cNvSpPr txBox="1"/>
+          <p:cNvSpPr txBox="1">
+            <a:spLocks noGrp="1"/>
+          </p:cNvSpPr>
           <p:nvPr>
             <p:ph type="sldNum" idx="12"/>
           </p:nvPr>
@@ -11822,13 +12096,14 @@
 </file>
 
 <file path=ppt/slideLayouts/slideLayout25.xml><?xml version="1.0" encoding="utf-8"?>
-<p:sldLayout xmlns:a="http://schemas.openxmlformats.org/drawingml/2006/main" xmlns:r="http://schemas.openxmlformats.org/officeDocument/2006/relationships" xmlns:p="http://schemas.openxmlformats.org/presentationml/2006/main" xmlns:m="http://schemas.openxmlformats.org/officeDocument/2006/math" xmlns:w="http://schemas.openxmlformats.org/wordprocessingml/2006/main" matchingName="6_Пользовательский макет" preserve="0" showMasterPhAnim="0" showMasterSp="1" userDrawn="1">
+<p:sldLayout xmlns:a="http://schemas.openxmlformats.org/drawingml/2006/main" xmlns:r="http://schemas.openxmlformats.org/officeDocument/2006/relationships" xmlns:p="http://schemas.openxmlformats.org/presentationml/2006/main" showMasterPhAnim="0" matchingName="6_Пользовательский макет" userDrawn="1">
   <p:cSld name="6_Пользовательский макет">
     <p:bg>
-      <p:bgPr shadeToTitle="0">
+      <p:bgPr>
         <a:solidFill>
           <a:srgbClr val="FFFFFF"/>
         </a:solidFill>
+        <a:effectLst/>
       </p:bgPr>
     </p:bg>
     <p:spTree>
@@ -11848,7 +12123,9 @@
       <p:sp>
         <p:nvSpPr>
           <p:cNvPr id="183325662" name="Google Shape;149;p27"/>
-          <p:cNvSpPr txBox="1"/>
+          <p:cNvSpPr txBox="1">
+            <a:spLocks noGrp="1"/>
+          </p:cNvSpPr>
           <p:nvPr>
             <p:ph type="title"/>
           </p:nvPr>
@@ -11993,7 +12270,9 @@
       <p:sp>
         <p:nvSpPr>
           <p:cNvPr id="943436744" name="Google Shape;150;p27"/>
-          <p:cNvSpPr txBox="1"/>
+          <p:cNvSpPr txBox="1">
+            <a:spLocks noGrp="1"/>
+          </p:cNvSpPr>
           <p:nvPr>
             <p:ph type="body" idx="1"/>
           </p:nvPr>
@@ -12163,7 +12442,9 @@
       <p:sp>
         <p:nvSpPr>
           <p:cNvPr id="847725286" name="Google Shape;151;p27"/>
-          <p:cNvSpPr txBox="1"/>
+          <p:cNvSpPr txBox="1">
+            <a:spLocks noGrp="1"/>
+          </p:cNvSpPr>
           <p:nvPr>
             <p:ph type="sldNum" idx="12"/>
           </p:nvPr>
@@ -12283,16 +12564,17 @@
 </file>
 
 <file path=ppt/slideLayouts/slideLayout26.xml><?xml version="1.0" encoding="utf-8"?>
-<p:sldLayout xmlns:a="http://schemas.openxmlformats.org/drawingml/2006/main" xmlns:r="http://schemas.openxmlformats.org/officeDocument/2006/relationships" xmlns:p="http://schemas.openxmlformats.org/presentationml/2006/main" xmlns:m="http://schemas.openxmlformats.org/officeDocument/2006/math" xmlns:w="http://schemas.openxmlformats.org/wordprocessingml/2006/main" matchingName="9_Custom Layout" preserve="0" showMasterPhAnim="0" showMasterSp="1" userDrawn="1">
+<p:sldLayout xmlns:a="http://schemas.openxmlformats.org/drawingml/2006/main" xmlns:r="http://schemas.openxmlformats.org/officeDocument/2006/relationships" xmlns:p="http://schemas.openxmlformats.org/presentationml/2006/main" showMasterPhAnim="0" matchingName="9_Custom Layout" userDrawn="1">
   <p:cSld name="9_Custom Layout">
     <p:bg>
-      <p:bgPr shadeToTitle="0">
+      <p:bgPr>
         <a:blipFill>
           <a:blip r:embed="rId2">
             <a:alphaModFix/>
           </a:blip>
           <a:stretch/>
         </a:blipFill>
+        <a:effectLst/>
       </p:bgPr>
     </p:bg>
     <p:spTree>
@@ -12312,7 +12594,9 @@
       <p:sp>
         <p:nvSpPr>
           <p:cNvPr id="1829683340" name="Google Shape;153;p28"/>
-          <p:cNvSpPr txBox="1"/>
+          <p:cNvSpPr txBox="1">
+            <a:spLocks noGrp="1"/>
+          </p:cNvSpPr>
           <p:nvPr>
             <p:ph type="body" idx="1"/>
           </p:nvPr>
@@ -12478,7 +12762,9 @@
       <p:sp>
         <p:nvSpPr>
           <p:cNvPr id="747033918" name="Google Shape;154;p28"/>
-          <p:cNvSpPr txBox="1"/>
+          <p:cNvSpPr txBox="1">
+            <a:spLocks noGrp="1"/>
+          </p:cNvSpPr>
           <p:nvPr>
             <p:ph type="title"/>
           </p:nvPr>
@@ -12623,7 +12909,9 @@
       <p:sp>
         <p:nvSpPr>
           <p:cNvPr id="1472026970" name="Google Shape;155;p28"/>
-          <p:cNvSpPr txBox="1"/>
+          <p:cNvSpPr txBox="1">
+            <a:spLocks noGrp="1"/>
+          </p:cNvSpPr>
           <p:nvPr>
             <p:ph type="sldNum" idx="12"/>
           </p:nvPr>
@@ -12707,13 +12995,14 @@
 </file>
 
 <file path=ppt/slideLayouts/slideLayout27.xml><?xml version="1.0" encoding="utf-8"?>
-<p:sldLayout xmlns:a="http://schemas.openxmlformats.org/drawingml/2006/main" xmlns:r="http://schemas.openxmlformats.org/officeDocument/2006/relationships" xmlns:p="http://schemas.openxmlformats.org/presentationml/2006/main" xmlns:m="http://schemas.openxmlformats.org/officeDocument/2006/math" xmlns:w="http://schemas.openxmlformats.org/wordprocessingml/2006/main" matchingName="3_Пользовательский макет" preserve="0" showMasterPhAnim="0" showMasterSp="1" userDrawn="1">
+<p:sldLayout xmlns:a="http://schemas.openxmlformats.org/drawingml/2006/main" xmlns:r="http://schemas.openxmlformats.org/officeDocument/2006/relationships" xmlns:p="http://schemas.openxmlformats.org/presentationml/2006/main" showMasterPhAnim="0" matchingName="3_Пользовательский макет" userDrawn="1">
   <p:cSld name="3_Пользовательский макет">
     <p:bg>
-      <p:bgPr shadeToTitle="0">
+      <p:bgPr>
         <a:solidFill>
           <a:srgbClr val="FFFFFF"/>
         </a:solidFill>
+        <a:effectLst/>
       </p:bgPr>
     </p:bg>
     <p:spTree>
@@ -12733,7 +13022,9 @@
       <p:sp>
         <p:nvSpPr>
           <p:cNvPr id="709902570" name="Google Shape;157;p29"/>
-          <p:cNvSpPr txBox="1"/>
+          <p:cNvSpPr txBox="1">
+            <a:spLocks noGrp="1"/>
+          </p:cNvSpPr>
           <p:nvPr>
             <p:ph type="title"/>
           </p:nvPr>
@@ -12878,7 +13169,9 @@
       <p:sp>
         <p:nvSpPr>
           <p:cNvPr id="593916931" name="Google Shape;158;p29"/>
-          <p:cNvSpPr/>
+          <p:cNvSpPr>
+            <a:spLocks noGrp="1"/>
+          </p:cNvSpPr>
           <p:nvPr>
             <p:ph type="pic" idx="2"/>
           </p:nvPr>
@@ -12902,7 +13195,9 @@
       <p:sp>
         <p:nvSpPr>
           <p:cNvPr id="1387268732" name="Google Shape;159;p29"/>
-          <p:cNvSpPr txBox="1"/>
+          <p:cNvSpPr txBox="1">
+            <a:spLocks noGrp="1"/>
+          </p:cNvSpPr>
           <p:nvPr>
             <p:ph type="body" idx="1"/>
           </p:nvPr>
@@ -13064,7 +13359,9 @@
       <p:sp>
         <p:nvSpPr>
           <p:cNvPr id="1184107982" name="Google Shape;160;p29"/>
-          <p:cNvSpPr txBox="1"/>
+          <p:cNvSpPr txBox="1">
+            <a:spLocks noGrp="1"/>
+          </p:cNvSpPr>
           <p:nvPr>
             <p:ph type="sldNum" idx="12"/>
           </p:nvPr>
@@ -13148,13 +13445,14 @@
 </file>
 
 <file path=ppt/slideLayouts/slideLayout28.xml><?xml version="1.0" encoding="utf-8"?>
-<p:sldLayout xmlns:a="http://schemas.openxmlformats.org/drawingml/2006/main" xmlns:r="http://schemas.openxmlformats.org/officeDocument/2006/relationships" xmlns:p="http://schemas.openxmlformats.org/presentationml/2006/main" xmlns:m="http://schemas.openxmlformats.org/officeDocument/2006/math" xmlns:w="http://schemas.openxmlformats.org/wordprocessingml/2006/main" matchingName="7_Пользовательский макет" preserve="0" showMasterPhAnim="0" showMasterSp="1" userDrawn="1">
+<p:sldLayout xmlns:a="http://schemas.openxmlformats.org/drawingml/2006/main" xmlns:r="http://schemas.openxmlformats.org/officeDocument/2006/relationships" xmlns:p="http://schemas.openxmlformats.org/presentationml/2006/main" showMasterPhAnim="0" matchingName="7_Пользовательский макет" userDrawn="1">
   <p:cSld name="7_Пользовательский макет">
     <p:bg>
-      <p:bgPr shadeToTitle="0">
+      <p:bgPr>
         <a:solidFill>
           <a:srgbClr val="FFFFFF"/>
         </a:solidFill>
+        <a:effectLst/>
       </p:bgPr>
     </p:bg>
     <p:spTree>
@@ -13174,7 +13472,9 @@
       <p:sp>
         <p:nvSpPr>
           <p:cNvPr id="291195825" name="Google Shape;162;p30"/>
-          <p:cNvSpPr txBox="1"/>
+          <p:cNvSpPr txBox="1">
+            <a:spLocks noGrp="1"/>
+          </p:cNvSpPr>
           <p:nvPr>
             <p:ph type="title"/>
           </p:nvPr>
@@ -13319,7 +13619,9 @@
       <p:sp>
         <p:nvSpPr>
           <p:cNvPr id="18617606" name="Google Shape;163;p30"/>
-          <p:cNvSpPr txBox="1"/>
+          <p:cNvSpPr txBox="1">
+            <a:spLocks noGrp="1"/>
+          </p:cNvSpPr>
           <p:nvPr>
             <p:ph type="body" idx="1"/>
           </p:nvPr>
@@ -13489,7 +13791,9 @@
       <p:sp>
         <p:nvSpPr>
           <p:cNvPr id="1411152430" name="Google Shape;164;p30"/>
-          <p:cNvSpPr txBox="1"/>
+          <p:cNvSpPr txBox="1">
+            <a:spLocks noGrp="1"/>
+          </p:cNvSpPr>
           <p:nvPr>
             <p:ph type="sldNum" idx="12"/>
           </p:nvPr>
@@ -13609,13 +13913,14 @@
 </file>
 
 <file path=ppt/slideLayouts/slideLayout29.xml><?xml version="1.0" encoding="utf-8"?>
-<p:sldLayout xmlns:a="http://schemas.openxmlformats.org/drawingml/2006/main" xmlns:r="http://schemas.openxmlformats.org/officeDocument/2006/relationships" xmlns:p="http://schemas.openxmlformats.org/presentationml/2006/main" xmlns:m="http://schemas.openxmlformats.org/officeDocument/2006/math" xmlns:w="http://schemas.openxmlformats.org/wordprocessingml/2006/main" matchingName="1_Пользовательский макет" preserve="0" showMasterPhAnim="0" showMasterSp="1" userDrawn="1">
+<p:sldLayout xmlns:a="http://schemas.openxmlformats.org/drawingml/2006/main" xmlns:r="http://schemas.openxmlformats.org/officeDocument/2006/relationships" xmlns:p="http://schemas.openxmlformats.org/presentationml/2006/main" showMasterPhAnim="0" matchingName="1_Пользовательский макет" userDrawn="1">
   <p:cSld name="1_Пользовательский макет">
     <p:bg>
-      <p:bgPr shadeToTitle="0">
+      <p:bgPr>
         <a:solidFill>
           <a:srgbClr val="FFFFFF"/>
         </a:solidFill>
+        <a:effectLst/>
       </p:bgPr>
     </p:bg>
     <p:spTree>
@@ -13635,7 +13940,9 @@
       <p:sp>
         <p:nvSpPr>
           <p:cNvPr id="1962648120" name="Google Shape;166;p31"/>
-          <p:cNvSpPr txBox="1"/>
+          <p:cNvSpPr txBox="1">
+            <a:spLocks noGrp="1"/>
+          </p:cNvSpPr>
           <p:nvPr>
             <p:ph type="body" idx="1"/>
           </p:nvPr>
@@ -13797,7 +14104,9 @@
       <p:sp>
         <p:nvSpPr>
           <p:cNvPr id="1847761479" name="Google Shape;167;p31"/>
-          <p:cNvSpPr txBox="1"/>
+          <p:cNvSpPr txBox="1">
+            <a:spLocks noGrp="1"/>
+          </p:cNvSpPr>
           <p:nvPr>
             <p:ph type="body" idx="2"/>
           </p:nvPr>
@@ -13962,7 +14271,9 @@
       <p:sp>
         <p:nvSpPr>
           <p:cNvPr id="343485346" name="Google Shape;168;p31"/>
-          <p:cNvSpPr txBox="1"/>
+          <p:cNvSpPr txBox="1">
+            <a:spLocks noGrp="1"/>
+          </p:cNvSpPr>
           <p:nvPr>
             <p:ph type="body" idx="3"/>
           </p:nvPr>
@@ -14124,7 +14435,9 @@
       <p:sp>
         <p:nvSpPr>
           <p:cNvPr id="1311442310" name="Google Shape;169;p31"/>
-          <p:cNvSpPr txBox="1"/>
+          <p:cNvSpPr txBox="1">
+            <a:spLocks noGrp="1"/>
+          </p:cNvSpPr>
           <p:nvPr>
             <p:ph type="body" idx="4"/>
           </p:nvPr>
@@ -14289,7 +14602,9 @@
       <p:sp>
         <p:nvSpPr>
           <p:cNvPr id="1740158427" name="Google Shape;170;p31"/>
-          <p:cNvSpPr txBox="1"/>
+          <p:cNvSpPr txBox="1">
+            <a:spLocks noGrp="1"/>
+          </p:cNvSpPr>
           <p:nvPr>
             <p:ph type="title"/>
           </p:nvPr>
@@ -14434,7 +14749,9 @@
       <p:sp>
         <p:nvSpPr>
           <p:cNvPr id="1503916709" name="Google Shape;171;p31"/>
-          <p:cNvSpPr txBox="1"/>
+          <p:cNvSpPr txBox="1">
+            <a:spLocks noGrp="1"/>
+          </p:cNvSpPr>
           <p:nvPr>
             <p:ph type="sldNum" idx="12"/>
           </p:nvPr>
@@ -14518,7 +14835,7 @@
 </file>
 
 <file path=ppt/slideLayouts/slideLayout3.xml><?xml version="1.0" encoding="utf-8"?>
-<p:sldLayout xmlns:a="http://schemas.openxmlformats.org/drawingml/2006/main" xmlns:r="http://schemas.openxmlformats.org/officeDocument/2006/relationships" xmlns:p="http://schemas.openxmlformats.org/presentationml/2006/main" xmlns:m="http://schemas.openxmlformats.org/officeDocument/2006/math" xmlns:w="http://schemas.openxmlformats.org/wordprocessingml/2006/main" matchingName="Title and body" preserve="0" showMasterPhAnim="0" showMasterSp="1" type="tx" userDrawn="1">
+<p:sldLayout xmlns:a="http://schemas.openxmlformats.org/drawingml/2006/main" xmlns:r="http://schemas.openxmlformats.org/officeDocument/2006/relationships" xmlns:p="http://schemas.openxmlformats.org/presentationml/2006/main" showMasterPhAnim="0" matchingName="Title and body" type="tx" userDrawn="1">
   <p:cSld name="TITLE_AND_BODY">
     <p:spTree>
       <p:nvGrpSpPr>
@@ -14537,7 +14854,9 @@
       <p:sp>
         <p:nvSpPr>
           <p:cNvPr id="981060132" name="Google Shape;17;p4"/>
-          <p:cNvSpPr txBox="1"/>
+          <p:cNvSpPr txBox="1">
+            <a:spLocks noGrp="1"/>
+          </p:cNvSpPr>
           <p:nvPr>
             <p:ph type="title"/>
           </p:nvPr>
@@ -14667,7 +14986,9 @@
       <p:sp>
         <p:nvSpPr>
           <p:cNvPr id="1549499743" name="Google Shape;18;p4"/>
-          <p:cNvSpPr txBox="1"/>
+          <p:cNvSpPr txBox="1">
+            <a:spLocks noGrp="1"/>
+          </p:cNvSpPr>
           <p:nvPr>
             <p:ph type="body" idx="1"/>
           </p:nvPr>
@@ -14797,7 +15118,9 @@
       <p:sp>
         <p:nvSpPr>
           <p:cNvPr id="270151439" name="Google Shape;19;p4"/>
-          <p:cNvSpPr txBox="1"/>
+          <p:cNvSpPr txBox="1">
+            <a:spLocks noGrp="1"/>
+          </p:cNvSpPr>
           <p:nvPr>
             <p:ph type="sldNum" idx="12"/>
           </p:nvPr>
@@ -14881,13 +15204,14 @@
 </file>
 
 <file path=ppt/slideLayouts/slideLayout30.xml><?xml version="1.0" encoding="utf-8"?>
-<p:sldLayout xmlns:a="http://schemas.openxmlformats.org/drawingml/2006/main" xmlns:r="http://schemas.openxmlformats.org/officeDocument/2006/relationships" xmlns:p="http://schemas.openxmlformats.org/presentationml/2006/main" xmlns:m="http://schemas.openxmlformats.org/officeDocument/2006/math" xmlns:w="http://schemas.openxmlformats.org/wordprocessingml/2006/main" matchingName="4_Пользовательский макет" preserve="0" showMasterPhAnim="0" showMasterSp="1" userDrawn="1">
+<p:sldLayout xmlns:a="http://schemas.openxmlformats.org/drawingml/2006/main" xmlns:r="http://schemas.openxmlformats.org/officeDocument/2006/relationships" xmlns:p="http://schemas.openxmlformats.org/presentationml/2006/main" showMasterPhAnim="0" matchingName="4_Пользовательский макет" userDrawn="1">
   <p:cSld name="4_Пользовательский макет">
     <p:bg>
-      <p:bgPr shadeToTitle="0">
+      <p:bgPr>
         <a:solidFill>
           <a:srgbClr val="FFFFFF"/>
         </a:solidFill>
+        <a:effectLst/>
       </p:bgPr>
     </p:bg>
     <p:spTree>
@@ -14907,7 +15231,9 @@
       <p:sp>
         <p:nvSpPr>
           <p:cNvPr id="1288785717" name="Google Shape;173;p32"/>
-          <p:cNvSpPr txBox="1"/>
+          <p:cNvSpPr txBox="1">
+            <a:spLocks noGrp="1"/>
+          </p:cNvSpPr>
           <p:nvPr>
             <p:ph type="title"/>
           </p:nvPr>
@@ -15052,7 +15378,9 @@
       <p:sp>
         <p:nvSpPr>
           <p:cNvPr id="8018783" name="Google Shape;174;p32"/>
-          <p:cNvSpPr/>
+          <p:cNvSpPr>
+            <a:spLocks noGrp="1"/>
+          </p:cNvSpPr>
           <p:nvPr>
             <p:ph type="pic" idx="2"/>
           </p:nvPr>
@@ -15076,7 +15404,9 @@
       <p:sp>
         <p:nvSpPr>
           <p:cNvPr id="1051781725" name="Google Shape;175;p32"/>
-          <p:cNvSpPr txBox="1"/>
+          <p:cNvSpPr txBox="1">
+            <a:spLocks noGrp="1"/>
+          </p:cNvSpPr>
           <p:nvPr>
             <p:ph type="body" idx="1"/>
           </p:nvPr>
@@ -15238,7 +15568,9 @@
       <p:sp>
         <p:nvSpPr>
           <p:cNvPr id="214415837" name="Google Shape;176;p32"/>
-          <p:cNvSpPr txBox="1"/>
+          <p:cNvSpPr txBox="1">
+            <a:spLocks noGrp="1"/>
+          </p:cNvSpPr>
           <p:nvPr>
             <p:ph type="sldNum" idx="12"/>
           </p:nvPr>
@@ -15322,13 +15654,14 @@
 </file>
 
 <file path=ppt/slideLayouts/slideLayout31.xml><?xml version="1.0" encoding="utf-8"?>
-<p:sldLayout xmlns:a="http://schemas.openxmlformats.org/drawingml/2006/main" xmlns:r="http://schemas.openxmlformats.org/officeDocument/2006/relationships" xmlns:p="http://schemas.openxmlformats.org/presentationml/2006/main" xmlns:m="http://schemas.openxmlformats.org/officeDocument/2006/math" xmlns:w="http://schemas.openxmlformats.org/wordprocessingml/2006/main" matchingName="8_Пользовательский макет" preserve="0" showMasterPhAnim="0" showMasterSp="1" userDrawn="1">
+<p:sldLayout xmlns:a="http://schemas.openxmlformats.org/drawingml/2006/main" xmlns:r="http://schemas.openxmlformats.org/officeDocument/2006/relationships" xmlns:p="http://schemas.openxmlformats.org/presentationml/2006/main" showMasterPhAnim="0" matchingName="8_Пользовательский макет" userDrawn="1">
   <p:cSld name="8_Пользовательский макет">
     <p:bg>
-      <p:bgPr shadeToTitle="0">
+      <p:bgPr>
         <a:solidFill>
           <a:srgbClr val="FFFFFF"/>
         </a:solidFill>
+        <a:effectLst/>
       </p:bgPr>
     </p:bg>
     <p:spTree>
@@ -15348,7 +15681,9 @@
       <p:sp>
         <p:nvSpPr>
           <p:cNvPr id="417184242" name="Google Shape;178;p33"/>
-          <p:cNvSpPr txBox="1"/>
+          <p:cNvSpPr txBox="1">
+            <a:spLocks noGrp="1"/>
+          </p:cNvSpPr>
           <p:nvPr>
             <p:ph type="title"/>
           </p:nvPr>
@@ -15493,7 +15828,9 @@
       <p:sp>
         <p:nvSpPr>
           <p:cNvPr id="1838099580" name="Google Shape;179;p33"/>
-          <p:cNvSpPr txBox="1"/>
+          <p:cNvSpPr txBox="1">
+            <a:spLocks noGrp="1"/>
+          </p:cNvSpPr>
           <p:nvPr>
             <p:ph type="body" idx="1"/>
           </p:nvPr>
@@ -15663,7 +16000,9 @@
       <p:sp>
         <p:nvSpPr>
           <p:cNvPr id="583453747" name="Google Shape;180;p33"/>
-          <p:cNvSpPr txBox="1"/>
+          <p:cNvSpPr txBox="1">
+            <a:spLocks noGrp="1"/>
+          </p:cNvSpPr>
           <p:nvPr>
             <p:ph type="sldNum" idx="12"/>
           </p:nvPr>
@@ -15783,13 +16122,14 @@
 </file>
 
 <file path=ppt/slideLayouts/slideLayout32.xml><?xml version="1.0" encoding="utf-8"?>
-<p:sldLayout xmlns:a="http://schemas.openxmlformats.org/drawingml/2006/main" xmlns:r="http://schemas.openxmlformats.org/officeDocument/2006/relationships" xmlns:p="http://schemas.openxmlformats.org/presentationml/2006/main" xmlns:m="http://schemas.openxmlformats.org/officeDocument/2006/math" xmlns:w="http://schemas.openxmlformats.org/wordprocessingml/2006/main" matchingName="2_Пользовательский макет" preserve="0" showMasterPhAnim="0" showMasterSp="1" userDrawn="1">
+<p:sldLayout xmlns:a="http://schemas.openxmlformats.org/drawingml/2006/main" xmlns:r="http://schemas.openxmlformats.org/officeDocument/2006/relationships" xmlns:p="http://schemas.openxmlformats.org/presentationml/2006/main" showMasterPhAnim="0" matchingName="2_Пользовательский макет" userDrawn="1">
   <p:cSld name="2_Пользовательский макет">
     <p:bg>
-      <p:bgPr shadeToTitle="0">
+      <p:bgPr>
         <a:solidFill>
           <a:srgbClr val="FFFFFF"/>
         </a:solidFill>
+        <a:effectLst/>
       </p:bgPr>
     </p:bg>
     <p:spTree>
@@ -15809,7 +16149,9 @@
       <p:sp>
         <p:nvSpPr>
           <p:cNvPr id="637977783" name="Google Shape;182;p34"/>
-          <p:cNvSpPr txBox="1"/>
+          <p:cNvSpPr txBox="1">
+            <a:spLocks noGrp="1"/>
+          </p:cNvSpPr>
           <p:nvPr>
             <p:ph type="title"/>
           </p:nvPr>
@@ -15954,7 +16296,9 @@
       <p:sp>
         <p:nvSpPr>
           <p:cNvPr id="911216840" name="Google Shape;183;p34"/>
-          <p:cNvSpPr txBox="1"/>
+          <p:cNvSpPr txBox="1">
+            <a:spLocks noGrp="1"/>
+          </p:cNvSpPr>
           <p:nvPr>
             <p:ph type="body" idx="1"/>
           </p:nvPr>
@@ -16116,7 +16460,9 @@
       <p:sp>
         <p:nvSpPr>
           <p:cNvPr id="1703033880" name="Google Shape;184;p34"/>
-          <p:cNvSpPr txBox="1"/>
+          <p:cNvSpPr txBox="1">
+            <a:spLocks noGrp="1"/>
+          </p:cNvSpPr>
           <p:nvPr>
             <p:ph type="body" idx="2"/>
           </p:nvPr>
@@ -16281,7 +16627,9 @@
       <p:sp>
         <p:nvSpPr>
           <p:cNvPr id="1246501761" name="Google Shape;185;p34"/>
-          <p:cNvSpPr txBox="1"/>
+          <p:cNvSpPr txBox="1">
+            <a:spLocks noGrp="1"/>
+          </p:cNvSpPr>
           <p:nvPr>
             <p:ph type="body" idx="3"/>
           </p:nvPr>
@@ -16443,7 +16791,9 @@
       <p:sp>
         <p:nvSpPr>
           <p:cNvPr id="654394831" name="Google Shape;186;p34"/>
-          <p:cNvSpPr txBox="1"/>
+          <p:cNvSpPr txBox="1">
+            <a:spLocks noGrp="1"/>
+          </p:cNvSpPr>
           <p:nvPr>
             <p:ph type="body" idx="4"/>
           </p:nvPr>
@@ -16608,7 +16958,9 @@
       <p:sp>
         <p:nvSpPr>
           <p:cNvPr id="1387683495" name="Google Shape;187;p34"/>
-          <p:cNvSpPr txBox="1"/>
+          <p:cNvSpPr txBox="1">
+            <a:spLocks noGrp="1"/>
+          </p:cNvSpPr>
           <p:nvPr>
             <p:ph type="sldNum" idx="12"/>
           </p:nvPr>
@@ -16692,16 +17044,17 @@
 </file>
 
 <file path=ppt/slideLayouts/slideLayout33.xml><?xml version="1.0" encoding="utf-8"?>
-<p:sldLayout xmlns:a="http://schemas.openxmlformats.org/drawingml/2006/main" xmlns:r="http://schemas.openxmlformats.org/officeDocument/2006/relationships" xmlns:p="http://schemas.openxmlformats.org/presentationml/2006/main" xmlns:m="http://schemas.openxmlformats.org/officeDocument/2006/math" xmlns:w="http://schemas.openxmlformats.org/wordprocessingml/2006/main" matchingName="7_Custom Layout" preserve="0" showMasterPhAnim="0" showMasterSp="1" userDrawn="1">
+<p:sldLayout xmlns:a="http://schemas.openxmlformats.org/drawingml/2006/main" xmlns:r="http://schemas.openxmlformats.org/officeDocument/2006/relationships" xmlns:p="http://schemas.openxmlformats.org/presentationml/2006/main" showMasterPhAnim="0" matchingName="7_Custom Layout" userDrawn="1">
   <p:cSld name="7_Custom Layout">
     <p:bg>
-      <p:bgPr shadeToTitle="0">
+      <p:bgPr>
         <a:blipFill>
           <a:blip r:embed="rId2">
             <a:alphaModFix/>
           </a:blip>
           <a:stretch/>
         </a:blipFill>
+        <a:effectLst/>
       </p:bgPr>
     </p:bg>
     <p:spTree>
@@ -16721,7 +17074,9 @@
       <p:sp>
         <p:nvSpPr>
           <p:cNvPr id="1572130096" name="Google Shape;189;p35"/>
-          <p:cNvSpPr txBox="1"/>
+          <p:cNvSpPr txBox="1">
+            <a:spLocks noGrp="1"/>
+          </p:cNvSpPr>
           <p:nvPr>
             <p:ph type="title"/>
           </p:nvPr>
@@ -16863,7 +17218,9 @@
       <p:sp>
         <p:nvSpPr>
           <p:cNvPr id="230586561" name="Google Shape;190;p35"/>
-          <p:cNvSpPr txBox="1"/>
+          <p:cNvSpPr txBox="1">
+            <a:spLocks noGrp="1"/>
+          </p:cNvSpPr>
           <p:nvPr>
             <p:ph type="body" idx="1"/>
           </p:nvPr>
@@ -17025,7 +17382,9 @@
       <p:sp>
         <p:nvSpPr>
           <p:cNvPr id="764516317" name="Google Shape;191;p35"/>
-          <p:cNvSpPr/>
+          <p:cNvSpPr>
+            <a:spLocks noGrp="1"/>
+          </p:cNvSpPr>
           <p:nvPr>
             <p:ph type="pic" idx="2"/>
           </p:nvPr>
@@ -17049,7 +17408,9 @@
       <p:sp>
         <p:nvSpPr>
           <p:cNvPr id="827098700" name="Google Shape;192;p35"/>
-          <p:cNvSpPr/>
+          <p:cNvSpPr>
+            <a:spLocks noGrp="1"/>
+          </p:cNvSpPr>
           <p:nvPr>
             <p:ph type="pic" idx="3"/>
           </p:nvPr>
@@ -17073,7 +17434,9 @@
       <p:sp>
         <p:nvSpPr>
           <p:cNvPr id="1557959761" name="Google Shape;193;p35"/>
-          <p:cNvSpPr/>
+          <p:cNvSpPr>
+            <a:spLocks noGrp="1"/>
+          </p:cNvSpPr>
           <p:nvPr>
             <p:ph type="pic" idx="4"/>
           </p:nvPr>
@@ -17097,7 +17460,9 @@
       <p:sp>
         <p:nvSpPr>
           <p:cNvPr id="1704354740" name="Google Shape;194;p35"/>
-          <p:cNvSpPr/>
+          <p:cNvSpPr>
+            <a:spLocks noGrp="1"/>
+          </p:cNvSpPr>
           <p:nvPr>
             <p:ph type="pic" idx="5"/>
           </p:nvPr>
@@ -17121,7 +17486,9 @@
       <p:sp>
         <p:nvSpPr>
           <p:cNvPr id="1430345629" name="Google Shape;195;p35"/>
-          <p:cNvSpPr txBox="1"/>
+          <p:cNvSpPr txBox="1">
+            <a:spLocks noGrp="1"/>
+          </p:cNvSpPr>
           <p:nvPr>
             <p:ph type="sldNum" idx="12"/>
           </p:nvPr>
@@ -17205,7 +17572,7 @@
 </file>
 
 <file path=ppt/slideLayouts/slideLayout4.xml><?xml version="1.0" encoding="utf-8"?>
-<p:sldLayout xmlns:a="http://schemas.openxmlformats.org/drawingml/2006/main" xmlns:r="http://schemas.openxmlformats.org/officeDocument/2006/relationships" xmlns:p="http://schemas.openxmlformats.org/presentationml/2006/main" xmlns:m="http://schemas.openxmlformats.org/officeDocument/2006/math" xmlns:w="http://schemas.openxmlformats.org/wordprocessingml/2006/main" matchingName="Title and two columns" preserve="0" showMasterPhAnim="0" showMasterSp="1" type="twoColTx" userDrawn="1">
+<p:sldLayout xmlns:a="http://schemas.openxmlformats.org/drawingml/2006/main" xmlns:r="http://schemas.openxmlformats.org/officeDocument/2006/relationships" xmlns:p="http://schemas.openxmlformats.org/presentationml/2006/main" showMasterPhAnim="0" matchingName="Title and two columns" type="twoColTx" userDrawn="1">
   <p:cSld name="TITLE_AND_TWO_COLUMNS">
     <p:spTree>
       <p:nvGrpSpPr>
@@ -17224,7 +17591,9 @@
       <p:sp>
         <p:nvSpPr>
           <p:cNvPr id="803346889" name="Google Shape;21;p5"/>
-          <p:cNvSpPr txBox="1"/>
+          <p:cNvSpPr txBox="1">
+            <a:spLocks noGrp="1"/>
+          </p:cNvSpPr>
           <p:nvPr>
             <p:ph type="title"/>
           </p:nvPr>
@@ -17354,7 +17723,9 @@
       <p:sp>
         <p:nvSpPr>
           <p:cNvPr id="1228503823" name="Google Shape;22;p5"/>
-          <p:cNvSpPr txBox="1"/>
+          <p:cNvSpPr txBox="1">
+            <a:spLocks noGrp="1"/>
+          </p:cNvSpPr>
           <p:nvPr>
             <p:ph type="body" idx="1"/>
           </p:nvPr>
@@ -17484,7 +17855,9 @@
       <p:sp>
         <p:nvSpPr>
           <p:cNvPr id="2131601526" name="Google Shape;23;p5"/>
-          <p:cNvSpPr txBox="1"/>
+          <p:cNvSpPr txBox="1">
+            <a:spLocks noGrp="1"/>
+          </p:cNvSpPr>
           <p:nvPr>
             <p:ph type="body" idx="2"/>
           </p:nvPr>
@@ -17614,7 +17987,9 @@
       <p:sp>
         <p:nvSpPr>
           <p:cNvPr id="417721734" name="Google Shape;24;p5"/>
-          <p:cNvSpPr txBox="1"/>
+          <p:cNvSpPr txBox="1">
+            <a:spLocks noGrp="1"/>
+          </p:cNvSpPr>
           <p:nvPr>
             <p:ph type="sldNum" idx="12"/>
           </p:nvPr>
@@ -17698,7 +18073,7 @@
 </file>
 
 <file path=ppt/slideLayouts/slideLayout5.xml><?xml version="1.0" encoding="utf-8"?>
-<p:sldLayout xmlns:a="http://schemas.openxmlformats.org/drawingml/2006/main" xmlns:r="http://schemas.openxmlformats.org/officeDocument/2006/relationships" xmlns:p="http://schemas.openxmlformats.org/presentationml/2006/main" xmlns:m="http://schemas.openxmlformats.org/officeDocument/2006/math" xmlns:w="http://schemas.openxmlformats.org/wordprocessingml/2006/main" matchingName="Title only" preserve="0" showMasterPhAnim="0" showMasterSp="1" type="titleOnly" userDrawn="1">
+<p:sldLayout xmlns:a="http://schemas.openxmlformats.org/drawingml/2006/main" xmlns:r="http://schemas.openxmlformats.org/officeDocument/2006/relationships" xmlns:p="http://schemas.openxmlformats.org/presentationml/2006/main" showMasterPhAnim="0" matchingName="Title only" type="titleOnly" userDrawn="1">
   <p:cSld name="TITLE_ONLY">
     <p:spTree>
       <p:nvGrpSpPr>
@@ -17717,7 +18092,9 @@
       <p:sp>
         <p:nvSpPr>
           <p:cNvPr id="793986702" name="Google Shape;26;p6"/>
-          <p:cNvSpPr txBox="1"/>
+          <p:cNvSpPr txBox="1">
+            <a:spLocks noGrp="1"/>
+          </p:cNvSpPr>
           <p:nvPr>
             <p:ph type="title"/>
           </p:nvPr>
@@ -17847,7 +18224,9 @@
       <p:sp>
         <p:nvSpPr>
           <p:cNvPr id="1726339278" name="Google Shape;27;p6"/>
-          <p:cNvSpPr txBox="1"/>
+          <p:cNvSpPr txBox="1">
+            <a:spLocks noGrp="1"/>
+          </p:cNvSpPr>
           <p:nvPr>
             <p:ph type="sldNum" idx="12"/>
           </p:nvPr>
@@ -17931,7 +18310,7 @@
 </file>
 
 <file path=ppt/slideLayouts/slideLayout6.xml><?xml version="1.0" encoding="utf-8"?>
-<p:sldLayout xmlns:a="http://schemas.openxmlformats.org/drawingml/2006/main" xmlns:r="http://schemas.openxmlformats.org/officeDocument/2006/relationships" xmlns:p="http://schemas.openxmlformats.org/presentationml/2006/main" xmlns:m="http://schemas.openxmlformats.org/officeDocument/2006/math" xmlns:w="http://schemas.openxmlformats.org/wordprocessingml/2006/main" matchingName="One column text" preserve="0" showMasterPhAnim="0" showMasterSp="1" userDrawn="1">
+<p:sldLayout xmlns:a="http://schemas.openxmlformats.org/drawingml/2006/main" xmlns:r="http://schemas.openxmlformats.org/officeDocument/2006/relationships" xmlns:p="http://schemas.openxmlformats.org/presentationml/2006/main" showMasterPhAnim="0" matchingName="One column text" userDrawn="1">
   <p:cSld name="ONE_COLUMN_TEXT">
     <p:spTree>
       <p:nvGrpSpPr>
@@ -17950,7 +18329,9 @@
       <p:sp>
         <p:nvSpPr>
           <p:cNvPr id="1832473127" name="Google Shape;29;p7"/>
-          <p:cNvSpPr txBox="1"/>
+          <p:cNvSpPr txBox="1">
+            <a:spLocks noGrp="1"/>
+          </p:cNvSpPr>
           <p:nvPr>
             <p:ph type="title"/>
           </p:nvPr>
@@ -18080,7 +18461,9 @@
       <p:sp>
         <p:nvSpPr>
           <p:cNvPr id="1810843977" name="Google Shape;30;p7"/>
-          <p:cNvSpPr txBox="1"/>
+          <p:cNvSpPr txBox="1">
+            <a:spLocks noGrp="1"/>
+          </p:cNvSpPr>
           <p:nvPr>
             <p:ph type="body" idx="1"/>
           </p:nvPr>
@@ -18210,7 +18593,9 @@
       <p:sp>
         <p:nvSpPr>
           <p:cNvPr id="2064982534" name="Google Shape;31;p7"/>
-          <p:cNvSpPr txBox="1"/>
+          <p:cNvSpPr txBox="1">
+            <a:spLocks noGrp="1"/>
+          </p:cNvSpPr>
           <p:nvPr>
             <p:ph type="sldNum" idx="12"/>
           </p:nvPr>
@@ -18294,7 +18679,7 @@
 </file>
 
 <file path=ppt/slideLayouts/slideLayout7.xml><?xml version="1.0" encoding="utf-8"?>
-<p:sldLayout xmlns:a="http://schemas.openxmlformats.org/drawingml/2006/main" xmlns:r="http://schemas.openxmlformats.org/officeDocument/2006/relationships" xmlns:p="http://schemas.openxmlformats.org/presentationml/2006/main" xmlns:m="http://schemas.openxmlformats.org/officeDocument/2006/math" xmlns:w="http://schemas.openxmlformats.org/wordprocessingml/2006/main" matchingName="Main point" preserve="0" showMasterPhAnim="0" showMasterSp="1" userDrawn="1">
+<p:sldLayout xmlns:a="http://schemas.openxmlformats.org/drawingml/2006/main" xmlns:r="http://schemas.openxmlformats.org/officeDocument/2006/relationships" xmlns:p="http://schemas.openxmlformats.org/presentationml/2006/main" showMasterPhAnim="0" matchingName="Main point" userDrawn="1">
   <p:cSld name="MAIN_POINT">
     <p:spTree>
       <p:nvGrpSpPr>
@@ -18313,7 +18698,9 @@
       <p:sp>
         <p:nvSpPr>
           <p:cNvPr id="1921015803" name="Google Shape;33;p8"/>
-          <p:cNvSpPr txBox="1"/>
+          <p:cNvSpPr txBox="1">
+            <a:spLocks noGrp="1"/>
+          </p:cNvSpPr>
           <p:nvPr>
             <p:ph type="title"/>
           </p:nvPr>
@@ -18443,7 +18830,9 @@
       <p:sp>
         <p:nvSpPr>
           <p:cNvPr id="1946501169" name="Google Shape;34;p8"/>
-          <p:cNvSpPr txBox="1"/>
+          <p:cNvSpPr txBox="1">
+            <a:spLocks noGrp="1"/>
+          </p:cNvSpPr>
           <p:nvPr>
             <p:ph type="sldNum" idx="12"/>
           </p:nvPr>
@@ -18527,7 +18916,7 @@
 </file>
 
 <file path=ppt/slideLayouts/slideLayout8.xml><?xml version="1.0" encoding="utf-8"?>
-<p:sldLayout xmlns:a="http://schemas.openxmlformats.org/drawingml/2006/main" xmlns:r="http://schemas.openxmlformats.org/officeDocument/2006/relationships" xmlns:p="http://schemas.openxmlformats.org/presentationml/2006/main" xmlns:m="http://schemas.openxmlformats.org/officeDocument/2006/math" xmlns:w="http://schemas.openxmlformats.org/wordprocessingml/2006/main" matchingName="Section title and description" preserve="0" showMasterPhAnim="0" showMasterSp="1" userDrawn="1">
+<p:sldLayout xmlns:a="http://schemas.openxmlformats.org/drawingml/2006/main" xmlns:r="http://schemas.openxmlformats.org/officeDocument/2006/relationships" xmlns:p="http://schemas.openxmlformats.org/presentationml/2006/main" showMasterPhAnim="0" matchingName="Section title and description" userDrawn="1">
   <p:cSld name="SECTION_TITLE_AND_DESCRIPTION">
     <p:spTree>
       <p:nvGrpSpPr>
@@ -18587,7 +18976,9 @@
       <p:sp>
         <p:nvSpPr>
           <p:cNvPr id="657209244" name="Google Shape;37;p9"/>
-          <p:cNvSpPr txBox="1"/>
+          <p:cNvSpPr txBox="1">
+            <a:spLocks noGrp="1"/>
+          </p:cNvSpPr>
           <p:nvPr>
             <p:ph type="title"/>
           </p:nvPr>
@@ -18717,7 +19108,9 @@
       <p:sp>
         <p:nvSpPr>
           <p:cNvPr id="1409190037" name="Google Shape;38;p9"/>
-          <p:cNvSpPr txBox="1"/>
+          <p:cNvSpPr txBox="1">
+            <a:spLocks noGrp="1"/>
+          </p:cNvSpPr>
           <p:nvPr>
             <p:ph type="subTitle" idx="1"/>
           </p:nvPr>
@@ -18874,7 +19267,9 @@
       <p:sp>
         <p:nvSpPr>
           <p:cNvPr id="1262019582" name="Google Shape;39;p9"/>
-          <p:cNvSpPr txBox="1"/>
+          <p:cNvSpPr txBox="1">
+            <a:spLocks noGrp="1"/>
+          </p:cNvSpPr>
           <p:nvPr>
             <p:ph type="body" idx="2"/>
           </p:nvPr>
@@ -19004,7 +19399,9 @@
       <p:sp>
         <p:nvSpPr>
           <p:cNvPr id="2025871801" name="Google Shape;40;p9"/>
-          <p:cNvSpPr txBox="1"/>
+          <p:cNvSpPr txBox="1">
+            <a:spLocks noGrp="1"/>
+          </p:cNvSpPr>
           <p:nvPr>
             <p:ph type="sldNum" idx="12"/>
           </p:nvPr>
@@ -19088,7 +19485,7 @@
 </file>
 
 <file path=ppt/slideLayouts/slideLayout9.xml><?xml version="1.0" encoding="utf-8"?>
-<p:sldLayout xmlns:a="http://schemas.openxmlformats.org/drawingml/2006/main" xmlns:r="http://schemas.openxmlformats.org/officeDocument/2006/relationships" xmlns:p="http://schemas.openxmlformats.org/presentationml/2006/main" xmlns:m="http://schemas.openxmlformats.org/officeDocument/2006/math" xmlns:w="http://schemas.openxmlformats.org/wordprocessingml/2006/main" matchingName="Caption" preserve="0" showMasterPhAnim="0" showMasterSp="1" userDrawn="1">
+<p:sldLayout xmlns:a="http://schemas.openxmlformats.org/drawingml/2006/main" xmlns:r="http://schemas.openxmlformats.org/officeDocument/2006/relationships" xmlns:p="http://schemas.openxmlformats.org/presentationml/2006/main" showMasterPhAnim="0" matchingName="Caption" userDrawn="1">
   <p:cSld name="CAPTION_ONLY">
     <p:spTree>
       <p:nvGrpSpPr>
@@ -19107,7 +19504,9 @@
       <p:sp>
         <p:nvSpPr>
           <p:cNvPr id="1513991035" name="Google Shape;42;p10"/>
-          <p:cNvSpPr txBox="1"/>
+          <p:cNvSpPr txBox="1">
+            <a:spLocks noGrp="1"/>
+          </p:cNvSpPr>
           <p:nvPr>
             <p:ph type="body" idx="1"/>
           </p:nvPr>
@@ -19152,7 +19551,9 @@
       <p:sp>
         <p:nvSpPr>
           <p:cNvPr id="895769671" name="Google Shape;43;p10"/>
-          <p:cNvSpPr txBox="1"/>
+          <p:cNvSpPr txBox="1">
+            <a:spLocks noGrp="1"/>
+          </p:cNvSpPr>
           <p:nvPr>
             <p:ph type="sldNum" idx="12"/>
           </p:nvPr>
@@ -19236,13 +19637,14 @@
 </file>
 
 <file path=ppt/slideMasters/slideMaster1.xml><?xml version="1.0" encoding="utf-8"?>
-<p:sldMaster xmlns:a="http://schemas.openxmlformats.org/drawingml/2006/main" xmlns:r="http://schemas.openxmlformats.org/officeDocument/2006/relationships" xmlns:p="http://schemas.openxmlformats.org/presentationml/2006/main" xmlns:m="http://schemas.openxmlformats.org/officeDocument/2006/math" xmlns:w="http://schemas.openxmlformats.org/wordprocessingml/2006/main" preserve="0">
+<p:sldMaster xmlns:a="http://schemas.openxmlformats.org/drawingml/2006/main" xmlns:r="http://schemas.openxmlformats.org/officeDocument/2006/relationships" xmlns:p="http://schemas.openxmlformats.org/presentationml/2006/main">
   <p:cSld name="simple-light-2">
     <p:bg>
-      <p:bgPr shadeToTitle="0">
+      <p:bgPr>
         <a:solidFill>
           <a:schemeClr val="lt1"/>
         </a:solidFill>
+        <a:effectLst/>
       </p:bgPr>
     </p:bg>
     <p:spTree>
@@ -19262,7 +19664,9 @@
       <p:sp>
         <p:nvSpPr>
           <p:cNvPr id="1275482601" name="Google Shape;6;p1"/>
-          <p:cNvSpPr txBox="1"/>
+          <p:cNvSpPr txBox="1">
+            <a:spLocks noGrp="1"/>
+          </p:cNvSpPr>
           <p:nvPr>
             <p:ph type="title"/>
           </p:nvPr>
@@ -19459,7 +19863,9 @@
       <p:sp>
         <p:nvSpPr>
           <p:cNvPr id="964525952" name="Google Shape;7;p1"/>
-          <p:cNvSpPr txBox="1"/>
+          <p:cNvSpPr txBox="1">
+            <a:spLocks noGrp="1"/>
+          </p:cNvSpPr>
           <p:nvPr>
             <p:ph type="body" idx="1"/>
           </p:nvPr>
@@ -19683,7 +20089,9 @@
       <p:sp>
         <p:nvSpPr>
           <p:cNvPr id="428986910" name="Google Shape;8;p1"/>
-          <p:cNvSpPr txBox="1"/>
+          <p:cNvSpPr txBox="1">
+            <a:spLocks noGrp="1"/>
+          </p:cNvSpPr>
           <p:nvPr>
             <p:ph type="sldNum" idx="12"/>
           </p:nvPr>
@@ -19814,7 +20222,7 @@
     <p:sldLayoutId id="2147483658" r:id="rId10"/>
     <p:sldLayoutId id="2147483659" r:id="rId11"/>
   </p:sldLayoutIdLst>
-  <p:hf dt="0" ftr="0" hdr="0" sldNum="1"/>
+  <p:hf hdr="0" ftr="0" dt="0"/>
   <p:txStyles>
     <p:titleStyle>
       <a:defPPr marR="0" lvl="0" algn="l">
@@ -20481,13 +20889,14 @@
 </file>
 
 <file path=ppt/slideMasters/slideMaster2.xml><?xml version="1.0" encoding="utf-8"?>
-<p:sldMaster xmlns:a="http://schemas.openxmlformats.org/drawingml/2006/main" xmlns:r="http://schemas.openxmlformats.org/officeDocument/2006/relationships" xmlns:p="http://schemas.openxmlformats.org/presentationml/2006/main" xmlns:m="http://schemas.openxmlformats.org/officeDocument/2006/math" xmlns:w="http://schemas.openxmlformats.org/wordprocessingml/2006/main" preserve="0">
-  <p:cSld name="">
+<p:sldMaster xmlns:a="http://schemas.openxmlformats.org/drawingml/2006/main" xmlns:r="http://schemas.openxmlformats.org/officeDocument/2006/relationships" xmlns:p="http://schemas.openxmlformats.org/presentationml/2006/main">
+  <p:cSld>
     <p:bg>
-      <p:bgPr shadeToTitle="0">
+      <p:bgPr>
         <a:solidFill>
           <a:schemeClr val="lt1"/>
         </a:solidFill>
+        <a:effectLst/>
       </p:bgPr>
     </p:bg>
     <p:spTree>
@@ -20507,7 +20916,9 @@
       <p:sp>
         <p:nvSpPr>
           <p:cNvPr id="196620665" name="Google Shape;51;p13"/>
-          <p:cNvSpPr txBox="1"/>
+          <p:cNvSpPr txBox="1">
+            <a:spLocks noGrp="1"/>
+          </p:cNvSpPr>
           <p:nvPr>
             <p:ph type="title"/>
           </p:nvPr>
@@ -20652,7 +21063,9 @@
       <p:sp>
         <p:nvSpPr>
           <p:cNvPr id="1810768636" name="Google Shape;52;p13"/>
-          <p:cNvSpPr txBox="1"/>
+          <p:cNvSpPr txBox="1">
+            <a:spLocks noGrp="1"/>
+          </p:cNvSpPr>
           <p:nvPr>
             <p:ph type="body" idx="1"/>
           </p:nvPr>
@@ -20977,7 +21390,9 @@
       <p:sp>
         <p:nvSpPr>
           <p:cNvPr id="1447917880" name="Google Shape;55;p13"/>
-          <p:cNvSpPr txBox="1"/>
+          <p:cNvSpPr txBox="1">
+            <a:spLocks noGrp="1"/>
+          </p:cNvSpPr>
           <p:nvPr>
             <p:ph type="sldNum" idx="12"/>
           </p:nvPr>
@@ -21146,7 +21561,7 @@
     <p:sldLayoutId id="2147483681" r:id="rId21"/>
     <p:sldLayoutId id="2147483682" r:id="rId22"/>
   </p:sldLayoutIdLst>
-  <p:hf dt="0" ftr="0" hdr="0" sldNum="1"/>
+  <p:hf hdr="0" ftr="0" dt="0"/>
   <p:txStyles>
     <p:titleStyle>
       <a:defPPr marR="0" lvl="0" algn="l">
@@ -21813,16 +22228,17 @@
 </file>
 
 <file path=ppt/slides/slide1.xml><?xml version="1.0" encoding="utf-8"?>
-<p:sld xmlns:a="http://schemas.openxmlformats.org/drawingml/2006/main" xmlns:r="http://schemas.openxmlformats.org/officeDocument/2006/relationships" xmlns:p="http://schemas.openxmlformats.org/presentationml/2006/main" xmlns:m="http://schemas.openxmlformats.org/officeDocument/2006/math" xmlns:w="http://schemas.openxmlformats.org/wordprocessingml/2006/main" xmlns:mc="http://schemas.openxmlformats.org/markup-compatibility/2006" showMasterPhAnim="0" showMasterSp="1" show="1">
-  <p:cSld name="">
+<p:sld xmlns:a="http://schemas.openxmlformats.org/drawingml/2006/main" xmlns:r="http://schemas.openxmlformats.org/officeDocument/2006/relationships" xmlns:p="http://schemas.openxmlformats.org/presentationml/2006/main" showMasterPhAnim="0">
+  <p:cSld>
     <p:bg>
-      <p:bgPr shadeToTitle="0">
+      <p:bgPr>
         <a:blipFill>
           <a:blip r:embed="rId3">
             <a:alphaModFix/>
           </a:blip>
           <a:stretch/>
         </a:blipFill>
+        <a:effectLst/>
       </p:bgPr>
     </p:bg>
     <p:spTree>
@@ -21842,13 +22258,15 @@
       <p:sp>
         <p:nvSpPr>
           <p:cNvPr id="1500091364" name="Google Shape;200;p36"/>
-          <p:cNvSpPr txBox="1"/>
+          <p:cNvSpPr txBox="1">
+            <a:spLocks noGrp="1"/>
+          </p:cNvSpPr>
           <p:nvPr>
             <p:ph type="title"/>
           </p:nvPr>
         </p:nvSpPr>
         <p:spPr bwMode="auto">
-          <a:xfrm flipH="0" flipV="0">
+          <a:xfrm>
             <a:off x="1371600" y="2219324"/>
             <a:ext cx="6465848" cy="992899"/>
           </a:xfrm>
@@ -22182,28 +22600,21 @@
   <p:clrMapOvr>
     <a:masterClrMapping/>
   </p:clrMapOvr>
-  <mc:AlternateContent xmlns:mc="http://schemas.openxmlformats.org/markup-compatibility/2006">
-    <mc:Choice xmlns:p159="http://schemas.microsoft.com/office/powerpoint/2015/09/main" xmlns:p14="http://schemas.microsoft.com/office/powerpoint/2010/main" Requires="p159">
-      <p:transition p14:dur="2000" advClick="1"/>
-    </mc:Choice>
-    <mc:Fallback>
-      <p:transition advClick="1"/>
-    </mc:Fallback>
-  </mc:AlternateContent>
 </p:sld>
 </file>
 
 <file path=ppt/slides/slide10.xml><?xml version="1.0" encoding="utf-8"?>
-<p:sld xmlns:a="http://schemas.openxmlformats.org/drawingml/2006/main" xmlns:r="http://schemas.openxmlformats.org/officeDocument/2006/relationships" xmlns:p="http://schemas.openxmlformats.org/presentationml/2006/main" xmlns:m="http://schemas.openxmlformats.org/officeDocument/2006/math" xmlns:w="http://schemas.openxmlformats.org/wordprocessingml/2006/main" xmlns:mc="http://schemas.openxmlformats.org/markup-compatibility/2006" showMasterPhAnim="0" showMasterSp="1" show="1">
-  <p:cSld name="">
+<p:sld xmlns:a="http://schemas.openxmlformats.org/drawingml/2006/main" xmlns:r="http://schemas.openxmlformats.org/officeDocument/2006/relationships" xmlns:p="http://schemas.openxmlformats.org/presentationml/2006/main" showMasterPhAnim="0">
+  <p:cSld>
     <p:bg>
-      <p:bgPr shadeToTitle="0">
+      <p:bgPr>
         <a:blipFill>
           <a:blip r:embed="rId3">
             <a:alphaModFix/>
           </a:blip>
           <a:stretch/>
         </a:blipFill>
+        <a:effectLst/>
       </p:bgPr>
     </p:bg>
     <p:spTree>
@@ -22223,7 +22634,9 @@
       <p:sp>
         <p:nvSpPr>
           <p:cNvPr id="1115100779" name="Google Shape;283;p47"/>
-          <p:cNvSpPr txBox="1"/>
+          <p:cNvSpPr txBox="1">
+            <a:spLocks noGrp="1"/>
+          </p:cNvSpPr>
           <p:nvPr>
             <p:ph type="title"/>
           </p:nvPr>
@@ -22368,7 +22781,9 @@
       <p:sp>
         <p:nvSpPr>
           <p:cNvPr id="1578255609" name="Google Shape;285;p47"/>
-          <p:cNvSpPr txBox="1"/>
+          <p:cNvSpPr txBox="1">
+            <a:spLocks noGrp="1"/>
+          </p:cNvSpPr>
           <p:nvPr>
             <p:ph type="sldNum" idx="12"/>
           </p:nvPr>
@@ -22404,7 +22819,7 @@
                   <a:schemeClr val="lt1"/>
                 </a:solidFill>
               </a:rPr>
-              <a:t>‹#›</a:t>
+              <a:t>10</a:t>
             </a:fld>
             <a:endParaRPr>
               <a:solidFill>
@@ -22419,20 +22834,12 @@
   <p:clrMapOvr>
     <a:masterClrMapping/>
   </p:clrMapOvr>
-  <mc:AlternateContent xmlns:mc="http://schemas.openxmlformats.org/markup-compatibility/2006">
-    <mc:Choice xmlns:p159="http://schemas.microsoft.com/office/powerpoint/2015/09/main" xmlns:p14="http://schemas.microsoft.com/office/powerpoint/2010/main" Requires="p159">
-      <p:transition p14:dur="2000" advClick="1"/>
-    </mc:Choice>
-    <mc:Fallback>
-      <p:transition advClick="1"/>
-    </mc:Fallback>
-  </mc:AlternateContent>
 </p:sld>
 </file>
 
 <file path=ppt/slides/slide2.xml><?xml version="1.0" encoding="utf-8"?>
-<p:sld xmlns:a="http://schemas.openxmlformats.org/drawingml/2006/main" xmlns:r="http://schemas.openxmlformats.org/officeDocument/2006/relationships" xmlns:p="http://schemas.openxmlformats.org/presentationml/2006/main" xmlns:m="http://schemas.openxmlformats.org/officeDocument/2006/math" xmlns:w="http://schemas.openxmlformats.org/wordprocessingml/2006/main" xmlns:mc="http://schemas.openxmlformats.org/markup-compatibility/2006" showMasterPhAnim="0" showMasterSp="1" show="1">
-  <p:cSld name="">
+<p:sld xmlns:a="http://schemas.openxmlformats.org/drawingml/2006/main" xmlns:r="http://schemas.openxmlformats.org/officeDocument/2006/relationships" xmlns:p="http://schemas.openxmlformats.org/presentationml/2006/main" showMasterPhAnim="0">
+  <p:cSld>
     <p:spTree>
       <p:nvGrpSpPr>
         <p:cNvPr id="1" name=""/>
@@ -22450,7 +22857,9 @@
       <p:sp>
         <p:nvSpPr>
           <p:cNvPr id="2102403831" name="Google Shape;207;p37"/>
-          <p:cNvSpPr txBox="1"/>
+          <p:cNvSpPr txBox="1">
+            <a:spLocks noGrp="1"/>
+          </p:cNvSpPr>
           <p:nvPr>
             <p:ph type="title"/>
           </p:nvPr>
@@ -22507,7 +22916,7 @@
           <a:blip r:embed="rId3">
             <a:alphaModFix/>
           </a:blip>
-          <a:srcRect l="0" t="0" r="0" b="0"/>
+          <a:srcRect/>
           <a:stretch/>
         </p:blipFill>
         <p:spPr bwMode="auto">
@@ -22527,7 +22936,9 @@
       <p:sp>
         <p:nvSpPr>
           <p:cNvPr id="851920035" name="Google Shape;210;p37"/>
-          <p:cNvSpPr txBox="1"/>
+          <p:cNvSpPr txBox="1">
+            <a:spLocks noGrp="1"/>
+          </p:cNvSpPr>
           <p:nvPr>
             <p:ph type="sldNum" idx="12"/>
           </p:nvPr>
@@ -22559,7 +22970,7 @@
             </a:pPr>
             <a:fld id="{00000000-1234-1234-1234-123412341234}" type="slidenum">
               <a:rPr lang="ru"/>
-              <a:t>‹#›</a:t>
+              <a:t>2</a:t>
             </a:fld>
             <a:endParaRPr/>
           </a:p>
@@ -22567,12 +22978,12 @@
       </p:sp>
       <p:sp>
         <p:nvSpPr>
-          <p:cNvPr id="571784567" name=""/>
+          <p:cNvPr id="571784567" name="TextBox 571784566"/>
           <p:cNvSpPr txBox="1"/>
           <p:nvPr/>
         </p:nvSpPr>
         <p:spPr bwMode="auto">
-          <a:xfrm flipH="0" flipV="0">
+          <a:xfrm>
             <a:off x="5492327" y="1274379"/>
             <a:ext cx="2911120" cy="2834999"/>
           </a:xfrm>
@@ -22582,9 +22993,10 @@
           <a:noFill/>
         </p:spPr>
         <p:txBody>
-          <a:bodyPr vertOverflow="overflow" horzOverflow="overflow" vert="horz" wrap="square" lIns="91440" tIns="45720" rIns="91440" bIns="45720" numCol="1" spcCol="0" rtlCol="0" fromWordArt="0" anchor="t" anchorCtr="0" forceAA="0" upright="0" compatLnSpc="0">
+          <a:bodyPr vertOverflow="overflow" horzOverflow="overflow" vert="horz" wrap="square" lIns="91440" tIns="45720" rIns="91440" bIns="45720" numCol="1" spcCol="0" rtlCol="0" fromWordArt="0" anchor="t" anchorCtr="0" forceAA="0" compatLnSpc="0">
             <a:spAutoFit/>
           </a:bodyPr>
+          <a:lstStyle/>
           <a:p>
             <a:pPr>
               <a:defRPr/>
@@ -22832,20 +23244,12 @@
   <p:clrMapOvr>
     <a:masterClrMapping/>
   </p:clrMapOvr>
-  <mc:AlternateContent xmlns:mc="http://schemas.openxmlformats.org/markup-compatibility/2006">
-    <mc:Choice xmlns:p159="http://schemas.microsoft.com/office/powerpoint/2015/09/main" xmlns:p14="http://schemas.microsoft.com/office/powerpoint/2010/main" Requires="p159">
-      <p:transition p14:dur="2000" advClick="1"/>
-    </mc:Choice>
-    <mc:Fallback>
-      <p:transition advClick="1"/>
-    </mc:Fallback>
-  </mc:AlternateContent>
 </p:sld>
 </file>
 
 <file path=ppt/slides/slide3.xml><?xml version="1.0" encoding="utf-8"?>
-<p:sld xmlns:a="http://schemas.openxmlformats.org/drawingml/2006/main" xmlns:r="http://schemas.openxmlformats.org/officeDocument/2006/relationships" xmlns:p="http://schemas.openxmlformats.org/presentationml/2006/main" xmlns:m="http://schemas.openxmlformats.org/officeDocument/2006/math" xmlns:w="http://schemas.openxmlformats.org/wordprocessingml/2006/main" xmlns:mc="http://schemas.openxmlformats.org/markup-compatibility/2006" showMasterPhAnim="0" showMasterSp="1" show="1">
-  <p:cSld name="">
+<p:sld xmlns:a="http://schemas.openxmlformats.org/drawingml/2006/main" xmlns:r="http://schemas.openxmlformats.org/officeDocument/2006/relationships" xmlns:p="http://schemas.openxmlformats.org/presentationml/2006/main" showMasterPhAnim="0">
+  <p:cSld>
     <p:spTree>
       <p:nvGrpSpPr>
         <p:cNvPr id="1" name=""/>
@@ -22863,7 +23267,9 @@
       <p:sp>
         <p:nvSpPr>
           <p:cNvPr id="683061988" name="Google Shape;215;p38"/>
-          <p:cNvSpPr txBox="1"/>
+          <p:cNvSpPr txBox="1">
+            <a:spLocks noGrp="1"/>
+          </p:cNvSpPr>
           <p:nvPr>
             <p:ph type="body" idx="1"/>
           </p:nvPr>
@@ -22943,7 +23349,9 @@
       <p:sp>
         <p:nvSpPr>
           <p:cNvPr id="88347436" name="Google Shape;216;p38"/>
-          <p:cNvSpPr txBox="1"/>
+          <p:cNvSpPr txBox="1">
+            <a:spLocks noGrp="1"/>
+          </p:cNvSpPr>
           <p:nvPr>
             <p:ph type="body" idx="2"/>
           </p:nvPr>
@@ -23000,7 +23408,9 @@
       <p:sp>
         <p:nvSpPr>
           <p:cNvPr id="628614028" name="Google Shape;217;p38"/>
-          <p:cNvSpPr txBox="1"/>
+          <p:cNvSpPr txBox="1">
+            <a:spLocks noGrp="1"/>
+          </p:cNvSpPr>
           <p:nvPr>
             <p:ph type="title"/>
           </p:nvPr>
@@ -23050,7 +23460,9 @@
       <p:sp>
         <p:nvSpPr>
           <p:cNvPr id="550369281" name="Google Shape;218;p38"/>
-          <p:cNvSpPr txBox="1"/>
+          <p:cNvSpPr txBox="1">
+            <a:spLocks noGrp="1"/>
+          </p:cNvSpPr>
           <p:nvPr>
             <p:ph type="body" idx="3"/>
           </p:nvPr>
@@ -23069,7 +23481,7 @@
           </a:ln>
         </p:spPr>
         <p:txBody>
-          <a:bodyPr spcFirstLastPara="1" vertOverflow="overflow" horzOverflow="overflow" vert="horz" wrap="square" lIns="91424" tIns="45699" rIns="91424" bIns="45699" numCol="1" spcCol="0" rtlCol="0" fromWordArt="0" anchor="t" anchorCtr="0" forceAA="0" upright="0" compatLnSpc="0">
+          <a:bodyPr spcFirstLastPara="1" vertOverflow="overflow" horzOverflow="overflow" vert="horz" wrap="square" lIns="91424" tIns="45699" rIns="91424" bIns="45699" numCol="1" spcCol="0" rtlCol="0" fromWordArt="0" anchor="t" anchorCtr="0" forceAA="0" compatLnSpc="0">
             <a:normAutofit/>
           </a:bodyPr>
           <a:lstStyle/>
@@ -23246,7 +23658,9 @@
       <p:sp>
         <p:nvSpPr>
           <p:cNvPr id="710355730" name="Google Shape;219;p38"/>
-          <p:cNvSpPr txBox="1"/>
+          <p:cNvSpPr txBox="1">
+            <a:spLocks noGrp="1"/>
+          </p:cNvSpPr>
           <p:nvPr>
             <p:ph type="body" idx="4"/>
           </p:nvPr>
@@ -23298,7 +23712,9 @@
       <p:sp>
         <p:nvSpPr>
           <p:cNvPr id="1758699008" name="Google Shape;220;p38"/>
-          <p:cNvSpPr txBox="1"/>
+          <p:cNvSpPr txBox="1">
+            <a:spLocks noGrp="1"/>
+          </p:cNvSpPr>
           <p:nvPr>
             <p:ph type="sldNum" idx="12"/>
           </p:nvPr>
@@ -23334,7 +23750,7 @@
                   <a:schemeClr val="lt1"/>
                 </a:solidFill>
               </a:rPr>
-              <a:t>‹#›</a:t>
+              <a:t>3</a:t>
             </a:fld>
             <a:endParaRPr>
               <a:solidFill>
@@ -23349,20 +23765,12 @@
   <p:clrMapOvr>
     <a:masterClrMapping/>
   </p:clrMapOvr>
-  <mc:AlternateContent xmlns:mc="http://schemas.openxmlformats.org/markup-compatibility/2006">
-    <mc:Choice xmlns:p159="http://schemas.microsoft.com/office/powerpoint/2015/09/main" xmlns:p14="http://schemas.microsoft.com/office/powerpoint/2010/main" Requires="p159">
-      <p:transition p14:dur="2000" advClick="1"/>
-    </mc:Choice>
-    <mc:Fallback>
-      <p:transition advClick="1"/>
-    </mc:Fallback>
-  </mc:AlternateContent>
 </p:sld>
 </file>
 
 <file path=ppt/slides/slide4.xml><?xml version="1.0" encoding="utf-8"?>
-<p:sld xmlns:a="http://schemas.openxmlformats.org/drawingml/2006/main" xmlns:r="http://schemas.openxmlformats.org/officeDocument/2006/relationships" xmlns:p="http://schemas.openxmlformats.org/presentationml/2006/main" xmlns:m="http://schemas.openxmlformats.org/officeDocument/2006/math" xmlns:w="http://schemas.openxmlformats.org/wordprocessingml/2006/main" xmlns:mc="http://schemas.openxmlformats.org/markup-compatibility/2006" showMasterPhAnim="0" showMasterSp="1" show="1">
-  <p:cSld name="">
+<p:sld xmlns:a="http://schemas.openxmlformats.org/drawingml/2006/main" xmlns:r="http://schemas.openxmlformats.org/officeDocument/2006/relationships" xmlns:p="http://schemas.openxmlformats.org/presentationml/2006/main" showMasterPhAnim="0">
+  <p:cSld>
     <p:spTree>
       <p:nvGrpSpPr>
         <p:cNvPr id="1" name=""/>
@@ -23380,7 +23788,9 @@
       <p:sp>
         <p:nvSpPr>
           <p:cNvPr id="1664474107" name="Google Shape;225;p39"/>
-          <p:cNvSpPr txBox="1"/>
+          <p:cNvSpPr txBox="1">
+            <a:spLocks noGrp="1"/>
+          </p:cNvSpPr>
           <p:nvPr>
             <p:ph type="title"/>
           </p:nvPr>
@@ -23430,7 +23840,9 @@
       <p:sp>
         <p:nvSpPr>
           <p:cNvPr id="974305867" name="Google Shape;226;p39"/>
-          <p:cNvSpPr txBox="1"/>
+          <p:cNvSpPr txBox="1">
+            <a:spLocks noGrp="1"/>
+          </p:cNvSpPr>
           <p:nvPr>
             <p:ph type="body" idx="1"/>
           </p:nvPr>
@@ -23595,7 +24007,9 @@
       <p:sp>
         <p:nvSpPr>
           <p:cNvPr id="1646811629" name="Google Shape;227;p39"/>
-          <p:cNvSpPr txBox="1"/>
+          <p:cNvSpPr txBox="1">
+            <a:spLocks noGrp="1"/>
+          </p:cNvSpPr>
           <p:nvPr>
             <p:ph type="sldNum" idx="12"/>
           </p:nvPr>
@@ -23627,7 +24041,7 @@
             </a:pPr>
             <a:fld id="{00000000-1234-1234-1234-123412341234}" type="slidenum">
               <a:rPr lang="ru"/>
-              <a:t>‹#›</a:t>
+              <a:t>4</a:t>
             </a:fld>
             <a:endParaRPr/>
           </a:p>
@@ -23638,20 +24052,12 @@
   <p:clrMapOvr>
     <a:masterClrMapping/>
   </p:clrMapOvr>
-  <mc:AlternateContent xmlns:mc="http://schemas.openxmlformats.org/markup-compatibility/2006">
-    <mc:Choice xmlns:p159="http://schemas.microsoft.com/office/powerpoint/2015/09/main" xmlns:p14="http://schemas.microsoft.com/office/powerpoint/2010/main" Requires="p159">
-      <p:transition p14:dur="2000" advClick="1"/>
-    </mc:Choice>
-    <mc:Fallback>
-      <p:transition advClick="1"/>
-    </mc:Fallback>
-  </mc:AlternateContent>
 </p:sld>
 </file>
 
 <file path=ppt/slides/slide5.xml><?xml version="1.0" encoding="utf-8"?>
-<p:sld xmlns:a="http://schemas.openxmlformats.org/drawingml/2006/main" xmlns:r="http://schemas.openxmlformats.org/officeDocument/2006/relationships" xmlns:p="http://schemas.openxmlformats.org/presentationml/2006/main" xmlns:m="http://schemas.openxmlformats.org/officeDocument/2006/math" xmlns:w="http://schemas.openxmlformats.org/wordprocessingml/2006/main" xmlns:mc="http://schemas.openxmlformats.org/markup-compatibility/2006" showMasterPhAnim="0" showMasterSp="1" show="1">
-  <p:cSld name="">
+<p:sld xmlns:a="http://schemas.openxmlformats.org/drawingml/2006/main" xmlns:r="http://schemas.openxmlformats.org/officeDocument/2006/relationships" xmlns:p="http://schemas.openxmlformats.org/presentationml/2006/main" showMasterPhAnim="0">
+  <p:cSld>
     <p:spTree>
       <p:nvGrpSpPr>
         <p:cNvPr id="1" name=""/>
@@ -23669,7 +24075,9 @@
       <p:sp>
         <p:nvSpPr>
           <p:cNvPr id="1039593072" name="Google Shape;239;p41"/>
-          <p:cNvSpPr txBox="1"/>
+          <p:cNvSpPr txBox="1">
+            <a:spLocks noGrp="1"/>
+          </p:cNvSpPr>
           <p:nvPr>
             <p:ph type="title"/>
           </p:nvPr>
@@ -23715,7 +24123,9 @@
       <p:sp>
         <p:nvSpPr>
           <p:cNvPr id="152373147" name="Google Shape;240;p41"/>
-          <p:cNvSpPr txBox="1"/>
+          <p:cNvSpPr txBox="1">
+            <a:spLocks noGrp="1"/>
+          </p:cNvSpPr>
           <p:nvPr>
             <p:ph type="body" idx="1"/>
           </p:nvPr>
@@ -23829,15 +24239,7 @@
             </a:r>
             <a:r>
               <a:rPr lang="ru"/>
-              <a:t> — </a:t>
-            </a:r>
-            <a:r>
-              <a:rPr lang="ru"/>
-              <a:t>подает</a:t>
-            </a:r>
-            <a:r>
-              <a:rPr lang="ru"/>
-              <a:t> заявку, вносит платежи, получает уведомления</a:t>
+              <a:t> — подает заявку, вносит платежи, получает уведомления</a:t>
             </a:r>
             <a:br>
               <a:rPr lang="ru"/>
@@ -23964,7 +24366,9 @@
       <p:sp>
         <p:nvSpPr>
           <p:cNvPr id="1964949276" name="Google Shape;241;p41"/>
-          <p:cNvSpPr txBox="1"/>
+          <p:cNvSpPr txBox="1">
+            <a:spLocks noGrp="1"/>
+          </p:cNvSpPr>
           <p:nvPr>
             <p:ph type="sldNum" idx="12"/>
           </p:nvPr>
@@ -23996,7 +24400,7 @@
             </a:pPr>
             <a:fld id="{00000000-1234-1234-1234-123412341234}" type="slidenum">
               <a:rPr lang="ru"/>
-              <a:t>‹#›</a:t>
+              <a:t>5</a:t>
             </a:fld>
             <a:endParaRPr/>
           </a:p>
@@ -24007,20 +24411,12 @@
   <p:clrMapOvr>
     <a:masterClrMapping/>
   </p:clrMapOvr>
-  <mc:AlternateContent xmlns:mc="http://schemas.openxmlformats.org/markup-compatibility/2006">
-    <mc:Choice xmlns:p159="http://schemas.microsoft.com/office/powerpoint/2015/09/main" xmlns:p14="http://schemas.microsoft.com/office/powerpoint/2010/main" Requires="p159">
-      <p:transition p14:dur="2000" advClick="1"/>
-    </mc:Choice>
-    <mc:Fallback>
-      <p:transition advClick="1"/>
-    </mc:Fallback>
-  </mc:AlternateContent>
 </p:sld>
 </file>
 
 <file path=ppt/slides/slide6.xml><?xml version="1.0" encoding="utf-8"?>
-<p:sld xmlns:a="http://schemas.openxmlformats.org/drawingml/2006/main" xmlns:r="http://schemas.openxmlformats.org/officeDocument/2006/relationships" xmlns:p="http://schemas.openxmlformats.org/presentationml/2006/main" xmlns:m="http://schemas.openxmlformats.org/officeDocument/2006/math" xmlns:w="http://schemas.openxmlformats.org/wordprocessingml/2006/main" xmlns:mc="http://schemas.openxmlformats.org/markup-compatibility/2006" showMasterPhAnim="0" showMasterSp="1" show="1">
-  <p:cSld name="">
+<p:sld xmlns:a="http://schemas.openxmlformats.org/drawingml/2006/main" xmlns:r="http://schemas.openxmlformats.org/officeDocument/2006/relationships" xmlns:p="http://schemas.openxmlformats.org/presentationml/2006/main" showMasterPhAnim="0">
+  <p:cSld>
     <p:spTree>
       <p:nvGrpSpPr>
         <p:cNvPr id="1" name=""/>
@@ -24038,7 +24434,9 @@
       <p:sp>
         <p:nvSpPr>
           <p:cNvPr id="2032324945" name="Google Shape;253;p43"/>
-          <p:cNvSpPr txBox="1"/>
+          <p:cNvSpPr txBox="1">
+            <a:spLocks noGrp="1"/>
+          </p:cNvSpPr>
           <p:nvPr>
             <p:ph type="title"/>
           </p:nvPr>
@@ -24147,7 +24545,9 @@
       <p:sp>
         <p:nvSpPr>
           <p:cNvPr id="1373740484" name="Google Shape;256;p43"/>
-          <p:cNvSpPr txBox="1"/>
+          <p:cNvSpPr txBox="1">
+            <a:spLocks noGrp="1"/>
+          </p:cNvSpPr>
           <p:nvPr>
             <p:ph type="sldNum" idx="12"/>
           </p:nvPr>
@@ -24179,7 +24579,7 @@
             </a:pPr>
             <a:fld id="{00000000-1234-1234-1234-123412341234}" type="slidenum">
               <a:rPr lang="ru"/>
-              <a:t>‹#›</a:t>
+              <a:t>6</a:t>
             </a:fld>
             <a:endParaRPr/>
           </a:p>
@@ -24187,7 +24587,13 @@
       </p:sp>
       <p:pic>
         <p:nvPicPr>
-          <p:cNvPr id="1418672419" name=""/>
+          <p:cNvPr id="3" name="Picture 2" descr="A computer screen shot of a diagram&#10;&#10;AI-generated content may be incorrect.">
+            <a:extLst>
+              <a:ext uri="{FF2B5EF4-FFF2-40B4-BE49-F238E27FC236}">
+                <a16:creationId xmlns:a16="http://schemas.microsoft.com/office/drawing/2014/main" id="{96ECC28A-7C12-9680-2C98-F06623A7A30C}"/>
+              </a:ext>
+            </a:extLst>
+          </p:cNvPr>
           <p:cNvPicPr>
             <a:picLocks noChangeAspect="1"/>
           </p:cNvPicPr>
@@ -24195,12 +24601,14 @@
         </p:nvPicPr>
         <p:blipFill>
           <a:blip r:embed="rId3"/>
-          <a:stretch/>
+          <a:stretch>
+            <a:fillRect/>
+          </a:stretch>
         </p:blipFill>
-        <p:spPr bwMode="auto">
+        <p:spPr>
           <a:xfrm>
-            <a:off x="5" y="0"/>
-            <a:ext cx="6656293" cy="5143500"/>
+            <a:off x="0" y="0"/>
+            <a:ext cx="6697687" cy="5143500"/>
           </a:xfrm>
           <a:prstGeom prst="rect">
             <a:avLst/>
@@ -24212,20 +24620,12 @@
   <p:clrMapOvr>
     <a:masterClrMapping/>
   </p:clrMapOvr>
-  <mc:AlternateContent xmlns:mc="http://schemas.openxmlformats.org/markup-compatibility/2006">
-    <mc:Choice xmlns:p159="http://schemas.microsoft.com/office/powerpoint/2015/09/main" xmlns:p14="http://schemas.microsoft.com/office/powerpoint/2010/main" Requires="p159">
-      <p:transition p14:dur="2000" advClick="1"/>
-    </mc:Choice>
-    <mc:Fallback>
-      <p:transition advClick="1"/>
-    </mc:Fallback>
-  </mc:AlternateContent>
 </p:sld>
 </file>
 
 <file path=ppt/slides/slide7.xml><?xml version="1.0" encoding="utf-8"?>
-<p:sld xmlns:a="http://schemas.openxmlformats.org/drawingml/2006/main" xmlns:r="http://schemas.openxmlformats.org/officeDocument/2006/relationships" xmlns:p="http://schemas.openxmlformats.org/presentationml/2006/main" xmlns:m="http://schemas.openxmlformats.org/officeDocument/2006/math" xmlns:w="http://schemas.openxmlformats.org/wordprocessingml/2006/main" xmlns:mc="http://schemas.openxmlformats.org/markup-compatibility/2006" showMasterPhAnim="0" showMasterSp="1" show="1">
-  <p:cSld name="">
+<p:sld xmlns:a="http://schemas.openxmlformats.org/drawingml/2006/main" xmlns:r="http://schemas.openxmlformats.org/officeDocument/2006/relationships" xmlns:p="http://schemas.openxmlformats.org/presentationml/2006/main" showMasterPhAnim="0">
+  <p:cSld>
     <p:spTree>
       <p:nvGrpSpPr>
         <p:cNvPr id="1" name=""/>
@@ -24243,7 +24643,9 @@
       <p:sp>
         <p:nvSpPr>
           <p:cNvPr id="21022493" name="Google Shape;268;p45"/>
-          <p:cNvSpPr txBox="1"/>
+          <p:cNvSpPr txBox="1">
+            <a:spLocks noGrp="1"/>
+          </p:cNvSpPr>
           <p:nvPr>
             <p:ph type="title"/>
           </p:nvPr>
@@ -24352,7 +24754,9 @@
       <p:sp>
         <p:nvSpPr>
           <p:cNvPr id="1814079081" name="Google Shape;271;p45"/>
-          <p:cNvSpPr txBox="1"/>
+          <p:cNvSpPr txBox="1">
+            <a:spLocks noGrp="1"/>
+          </p:cNvSpPr>
           <p:nvPr>
             <p:ph type="sldNum" idx="12"/>
           </p:nvPr>
@@ -24384,7 +24788,7 @@
             </a:pPr>
             <a:fld id="{00000000-1234-1234-1234-123412341234}" type="slidenum">
               <a:rPr lang="ru"/>
-              <a:t>‹#›</a:t>
+              <a:t>7</a:t>
             </a:fld>
             <a:endParaRPr/>
           </a:p>
@@ -24392,7 +24796,13 @@
       </p:sp>
       <p:pic>
         <p:nvPicPr>
-          <p:cNvPr id="746296591" name=""/>
+          <p:cNvPr id="3" name="Picture 2" descr="A diagram of a company&#10;&#10;AI-generated content may be incorrect.">
+            <a:extLst>
+              <a:ext uri="{FF2B5EF4-FFF2-40B4-BE49-F238E27FC236}">
+                <a16:creationId xmlns:a16="http://schemas.microsoft.com/office/drawing/2014/main" id="{5876713A-C6BE-7E00-F564-4A5AE754DE22}"/>
+              </a:ext>
+            </a:extLst>
+          </p:cNvPr>
           <p:cNvPicPr>
             <a:picLocks noChangeAspect="1"/>
           </p:cNvPicPr>
@@ -24400,12 +24810,14 @@
         </p:nvPicPr>
         <p:blipFill>
           <a:blip r:embed="rId3"/>
-          <a:stretch/>
+          <a:stretch>
+            <a:fillRect/>
+          </a:stretch>
         </p:blipFill>
-        <p:spPr bwMode="auto">
+        <p:spPr>
           <a:xfrm>
             <a:off x="0" y="0"/>
-            <a:ext cx="6656293" cy="5143500"/>
+            <a:ext cx="6603480" cy="5052060"/>
           </a:xfrm>
           <a:prstGeom prst="rect">
             <a:avLst/>
@@ -24417,20 +24829,12 @@
   <p:clrMapOvr>
     <a:masterClrMapping/>
   </p:clrMapOvr>
-  <mc:AlternateContent xmlns:mc="http://schemas.openxmlformats.org/markup-compatibility/2006">
-    <mc:Choice xmlns:p159="http://schemas.microsoft.com/office/powerpoint/2015/09/main" xmlns:p14="http://schemas.microsoft.com/office/powerpoint/2010/main" Requires="p159">
-      <p:transition p14:dur="2000" advClick="1"/>
-    </mc:Choice>
-    <mc:Fallback>
-      <p:transition advClick="1"/>
-    </mc:Fallback>
-  </mc:AlternateContent>
 </p:sld>
 </file>
 
 <file path=ppt/slides/slide8.xml><?xml version="1.0" encoding="utf-8"?>
-<p:sld xmlns:a="http://schemas.openxmlformats.org/drawingml/2006/main" xmlns:r="http://schemas.openxmlformats.org/officeDocument/2006/relationships" xmlns:p="http://schemas.openxmlformats.org/presentationml/2006/main" xmlns:m="http://schemas.openxmlformats.org/officeDocument/2006/math" xmlns:w="http://schemas.openxmlformats.org/wordprocessingml/2006/main" xmlns:mc="http://schemas.openxmlformats.org/markup-compatibility/2006" showMasterPhAnim="0" showMasterSp="1" show="1">
-  <p:cSld name="">
+<p:sld xmlns:a="http://schemas.openxmlformats.org/drawingml/2006/main" xmlns:r="http://schemas.openxmlformats.org/officeDocument/2006/relationships" xmlns:p="http://schemas.openxmlformats.org/presentationml/2006/main" showMasterPhAnim="0">
+  <p:cSld>
     <p:spTree>
       <p:nvGrpSpPr>
         <p:cNvPr id="1" name=""/>
@@ -24448,7 +24852,9 @@
       <p:sp>
         <p:nvSpPr>
           <p:cNvPr id="461412155" name="Google Shape;261;p44"/>
-          <p:cNvSpPr txBox="1"/>
+          <p:cNvSpPr txBox="1">
+            <a:spLocks noGrp="1"/>
+          </p:cNvSpPr>
           <p:nvPr>
             <p:ph type="title"/>
           </p:nvPr>
@@ -24490,31 +24896,55 @@
         <p:nvGraphicFramePr>
           <p:cNvPr id="1300115097" name="Google Shape;262;p44"/>
           <p:cNvGraphicFramePr>
-            <a:graphicFrameLocks xmlns:a="http://schemas.openxmlformats.org/drawingml/2006/main"/>
+            <a:graphicFrameLocks/>
           </p:cNvGraphicFramePr>
           <p:nvPr/>
         </p:nvGraphicFramePr>
         <p:xfrm>
           <a:off x="560850" y="1087125"/>
-          <a:ext cx="3000000" cy="3000000"/>
+          <a:ext cx="6602949" cy="3662727"/>
         </p:xfrm>
         <a:graphic>
           <a:graphicData uri="http://schemas.openxmlformats.org/drawingml/2006/table">
             <a:tbl>
-              <a:tblPr firstRow="0" firstCol="0" lastRow="0" lastCol="0" bandRow="0" bandCol="0">
+              <a:tblPr>
                 <a:tableStyleId>{F881D1D8-8919-4FED-BC73-B33F8442779F}</a:tableStyleId>
-                <a:noFill/>
               </a:tblPr>
               <a:tblGrid>
-                <a:gridCol w="900000"/>
-                <a:gridCol w="1800000"/>
-                <a:gridCol w="1710000"/>
-                <a:gridCol w="2192949"/>
+                <a:gridCol w="900000">
+                  <a:extLst>
+                    <a:ext uri="{9D8B030D-6E8A-4147-A177-3AD203B41FA5}">
+                      <a16:colId xmlns:a16="http://schemas.microsoft.com/office/drawing/2014/main" val="20000"/>
+                    </a:ext>
+                  </a:extLst>
+                </a:gridCol>
+                <a:gridCol w="1800000">
+                  <a:extLst>
+                    <a:ext uri="{9D8B030D-6E8A-4147-A177-3AD203B41FA5}">
+                      <a16:colId xmlns:a16="http://schemas.microsoft.com/office/drawing/2014/main" val="20001"/>
+                    </a:ext>
+                  </a:extLst>
+                </a:gridCol>
+                <a:gridCol w="1710000">
+                  <a:extLst>
+                    <a:ext uri="{9D8B030D-6E8A-4147-A177-3AD203B41FA5}">
+                      <a16:colId xmlns:a16="http://schemas.microsoft.com/office/drawing/2014/main" val="20002"/>
+                    </a:ext>
+                  </a:extLst>
+                </a:gridCol>
+                <a:gridCol w="2192949">
+                  <a:extLst>
+                    <a:ext uri="{9D8B030D-6E8A-4147-A177-3AD203B41FA5}">
+                      <a16:colId xmlns:a16="http://schemas.microsoft.com/office/drawing/2014/main" val="20003"/>
+                    </a:ext>
+                  </a:extLst>
+                </a:gridCol>
               </a:tblGrid>
               <a:tr h="434513">
                 <a:tc>
                   <a:txBody>
                     <a:bodyPr/>
+                    <a:lstStyle/>
                     <a:p>
                       <a:pPr marL="0" lvl="0" indent="0" algn="ctr">
                         <a:lnSpc>
@@ -24547,6 +24977,7 @@
                 <a:tc>
                   <a:txBody>
                     <a:bodyPr/>
+                    <a:lstStyle/>
                     <a:p>
                       <a:pPr marL="0" lvl="0" indent="0" algn="ctr">
                         <a:lnSpc>
@@ -24594,6 +25025,7 @@
                 <a:tc>
                   <a:txBody>
                     <a:bodyPr/>
+                    <a:lstStyle/>
                     <a:p>
                       <a:pPr marL="0" lvl="0" indent="0" algn="ctr">
                         <a:lnSpc>
@@ -24626,6 +25058,7 @@
                 <a:tc>
                   <a:txBody>
                     <a:bodyPr/>
+                    <a:lstStyle/>
                     <a:p>
                       <a:pPr marL="0" lvl="0" indent="0" algn="ctr">
                         <a:lnSpc>
@@ -24649,11 +25082,17 @@
                   </a:txBody>
                   <a:tcPr marL="91425" marR="91425" marT="91425" marB="91425"/>
                 </a:tc>
+                <a:extLst>
+                  <a:ext uri="{0D108BD9-81ED-4DB2-BD59-A6C34878D82A}">
+                    <a16:rowId xmlns:a16="http://schemas.microsoft.com/office/drawing/2014/main" val="10000"/>
+                  </a:ext>
+                </a:extLst>
               </a:tr>
               <a:tr h="559893">
                 <a:tc>
                   <a:txBody>
                     <a:bodyPr/>
+                    <a:lstStyle/>
                     <a:p>
                       <a:pPr marL="0" lvl="0" indent="0" algn="l">
                         <a:spcBef>
@@ -24687,6 +25126,7 @@
                 <a:tc>
                   <a:txBody>
                     <a:bodyPr/>
+                    <a:lstStyle/>
                     <a:p>
                       <a:pPr marL="0" lvl="0" indent="0" algn="l">
                         <a:spcBef>
@@ -24738,6 +25178,7 @@
                 <a:tc>
                   <a:txBody>
                     <a:bodyPr/>
+                    <a:lstStyle/>
                     <a:p>
                       <a:pPr marL="0" lvl="0" indent="0" algn="l">
                         <a:spcBef>
@@ -24774,6 +25215,7 @@
                 <a:tc>
                   <a:txBody>
                     <a:bodyPr/>
+                    <a:lstStyle/>
                     <a:p>
                       <a:pPr marL="0" lvl="0" indent="0" algn="l">
                         <a:spcBef>
@@ -24801,11 +25243,17 @@
                   </a:txBody>
                   <a:tcPr marL="91425" marR="91425" marT="91425" marB="91425"/>
                 </a:tc>
+                <a:extLst>
+                  <a:ext uri="{0D108BD9-81ED-4DB2-BD59-A6C34878D82A}">
+                    <a16:rowId xmlns:a16="http://schemas.microsoft.com/office/drawing/2014/main" val="10001"/>
+                  </a:ext>
+                </a:extLst>
               </a:tr>
               <a:tr h="573662">
                 <a:tc>
                   <a:txBody>
                     <a:bodyPr/>
+                    <a:lstStyle/>
                     <a:p>
                       <a:pPr marL="0" lvl="0" indent="0" algn="l">
                         <a:spcBef>
@@ -24839,6 +25287,7 @@
                 <a:tc>
                   <a:txBody>
                     <a:bodyPr/>
+                    <a:lstStyle/>
                     <a:p>
                       <a:pPr marL="0" lvl="0" indent="0" algn="l">
                         <a:spcBef>
@@ -24890,6 +25339,7 @@
                 <a:tc>
                   <a:txBody>
                     <a:bodyPr/>
+                    <a:lstStyle/>
                     <a:p>
                       <a:pPr marL="0" lvl="0" indent="0" algn="l">
                         <a:spcBef>
@@ -24926,6 +25376,7 @@
                 <a:tc>
                   <a:txBody>
                     <a:bodyPr/>
+                    <a:lstStyle/>
                     <a:p>
                       <a:pPr marL="0" lvl="0" indent="0" algn="l">
                         <a:spcBef>
@@ -24953,11 +25404,17 @@
                   </a:txBody>
                   <a:tcPr marL="91425" marR="91425" marT="91425" marB="91425"/>
                 </a:tc>
+                <a:extLst>
+                  <a:ext uri="{0D108BD9-81ED-4DB2-BD59-A6C34878D82A}">
+                    <a16:rowId xmlns:a16="http://schemas.microsoft.com/office/drawing/2014/main" val="10002"/>
+                  </a:ext>
+                </a:extLst>
               </a:tr>
               <a:tr h="555336">
                 <a:tc>
                   <a:txBody>
                     <a:bodyPr/>
+                    <a:lstStyle/>
                     <a:p>
                       <a:pPr marL="0" lvl="0" indent="0" algn="l">
                         <a:spcBef>
@@ -24991,6 +25448,7 @@
                 <a:tc>
                   <a:txBody>
                     <a:bodyPr/>
+                    <a:lstStyle/>
                     <a:p>
                       <a:pPr marL="0" lvl="0" indent="0" algn="l">
                         <a:spcBef>
@@ -25042,6 +25500,7 @@
                 <a:tc>
                   <a:txBody>
                     <a:bodyPr/>
+                    <a:lstStyle/>
                     <a:p>
                       <a:pPr marL="0" lvl="0" indent="0" algn="l">
                         <a:spcBef>
@@ -25078,6 +25537,7 @@
                 <a:tc>
                   <a:txBody>
                     <a:bodyPr/>
+                    <a:lstStyle/>
                     <a:p>
                       <a:pPr marL="0" lvl="0" indent="0" algn="l">
                         <a:spcBef>
@@ -25105,11 +25565,17 @@
                   </a:txBody>
                   <a:tcPr marL="91425" marR="91425" marT="91425" marB="91425"/>
                 </a:tc>
+                <a:extLst>
+                  <a:ext uri="{0D108BD9-81ED-4DB2-BD59-A6C34878D82A}">
+                    <a16:rowId xmlns:a16="http://schemas.microsoft.com/office/drawing/2014/main" val="10003"/>
+                  </a:ext>
+                </a:extLst>
               </a:tr>
               <a:tr h="591988">
                 <a:tc>
                   <a:txBody>
                     <a:bodyPr/>
+                    <a:lstStyle/>
                     <a:p>
                       <a:pPr marL="0" lvl="0" indent="0" algn="l">
                         <a:spcBef>
@@ -25143,6 +25609,7 @@
                 <a:tc>
                   <a:txBody>
                     <a:bodyPr/>
+                    <a:lstStyle/>
                     <a:p>
                       <a:pPr marL="0" lvl="0" indent="0" algn="l">
                         <a:spcBef>
@@ -25194,6 +25661,7 @@
                 <a:tc>
                   <a:txBody>
                     <a:bodyPr/>
+                    <a:lstStyle/>
                     <a:p>
                       <a:pPr marL="0" lvl="0" indent="0" algn="l">
                         <a:spcBef>
@@ -25230,6 +25698,7 @@
                 <a:tc>
                   <a:txBody>
                     <a:bodyPr/>
+                    <a:lstStyle/>
                     <a:p>
                       <a:pPr marL="0" lvl="0" indent="0" algn="l">
                         <a:spcBef>
@@ -25257,11 +25726,17 @@
                   </a:txBody>
                   <a:tcPr marL="91425" marR="91425" marT="91425" marB="91425"/>
                 </a:tc>
+                <a:extLst>
+                  <a:ext uri="{0D108BD9-81ED-4DB2-BD59-A6C34878D82A}">
+                    <a16:rowId xmlns:a16="http://schemas.microsoft.com/office/drawing/2014/main" val="10004"/>
+                  </a:ext>
+                </a:extLst>
               </a:tr>
               <a:tr h="947335">
                 <a:tc>
                   <a:txBody>
                     <a:bodyPr/>
+                    <a:lstStyle/>
                     <a:p>
                       <a:pPr marL="0" lvl="0" indent="0" algn="l">
                         <a:spcBef>
@@ -25291,6 +25766,7 @@
                 <a:tc>
                   <a:txBody>
                     <a:bodyPr/>
+                    <a:lstStyle/>
                     <a:p>
                       <a:pPr marL="0" lvl="0" indent="0" algn="l">
                         <a:spcBef>
@@ -25327,10 +25803,14 @@
                         <a:srgbClr val="9E9E9E"/>
                       </a:solidFill>
                     </a:lnR>
-                    <a:lnT w="9524" algn="ctr">
+                    <a:lnT w="9525" cap="flat" cmpd="sng" algn="ctr">
                       <a:solidFill>
                         <a:srgbClr val="9E9E9E"/>
                       </a:solidFill>
+                      <a:prstDash val="solid"/>
+                      <a:round/>
+                      <a:headEnd type="none" w="med" len="med"/>
+                      <a:tailEnd type="none" w="med" len="med"/>
                     </a:lnT>
                     <a:lnB w="9524" algn="ctr">
                       <a:solidFill>
@@ -25342,6 +25822,7 @@
                 <a:tc>
                   <a:txBody>
                     <a:bodyPr/>
+                    <a:lstStyle/>
                     <a:p>
                       <a:pPr marL="0" lvl="0" indent="0" algn="l">
                         <a:spcBef>
@@ -25400,6 +25881,7 @@
                 <a:tc>
                   <a:txBody>
                     <a:bodyPr/>
+                    <a:lstStyle/>
                     <a:p>
                       <a:pPr marL="0" lvl="0" indent="0" algn="l">
                         <a:spcBef>
@@ -25427,6 +25909,11 @@
                   </a:txBody>
                   <a:tcPr marL="91424" marR="91424" marT="91424" marB="91424"/>
                 </a:tc>
+                <a:extLst>
+                  <a:ext uri="{0D108BD9-81ED-4DB2-BD59-A6C34878D82A}">
+                    <a16:rowId xmlns:a16="http://schemas.microsoft.com/office/drawing/2014/main" val="10005"/>
+                  </a:ext>
+                </a:extLst>
               </a:tr>
             </a:tbl>
           </a:graphicData>
@@ -25435,7 +25922,9 @@
       <p:sp>
         <p:nvSpPr>
           <p:cNvPr id="1884009958" name="Google Shape;263;p44"/>
-          <p:cNvSpPr txBox="1"/>
+          <p:cNvSpPr txBox="1">
+            <a:spLocks noGrp="1"/>
+          </p:cNvSpPr>
           <p:nvPr>
             <p:ph type="sldNum" idx="12"/>
           </p:nvPr>
@@ -25467,7 +25956,7 @@
             </a:pPr>
             <a:fld id="{00000000-1234-1234-1234-123412341234}" type="slidenum">
               <a:rPr lang="ru"/>
-              <a:t>‹#›</a:t>
+              <a:t>8</a:t>
             </a:fld>
             <a:endParaRPr/>
           </a:p>
@@ -25478,20 +25967,12 @@
   <p:clrMapOvr>
     <a:masterClrMapping/>
   </p:clrMapOvr>
-  <mc:AlternateContent xmlns:mc="http://schemas.openxmlformats.org/markup-compatibility/2006">
-    <mc:Choice xmlns:p159="http://schemas.microsoft.com/office/powerpoint/2015/09/main" xmlns:p14="http://schemas.microsoft.com/office/powerpoint/2010/main" Requires="p159">
-      <p:transition p14:dur="2000" advClick="1"/>
-    </mc:Choice>
-    <mc:Fallback>
-      <p:transition advClick="1"/>
-    </mc:Fallback>
-  </mc:AlternateContent>
 </p:sld>
 </file>
 
 <file path=ppt/slides/slide9.xml><?xml version="1.0" encoding="utf-8"?>
-<p:sld xmlns:a="http://schemas.openxmlformats.org/drawingml/2006/main" xmlns:r="http://schemas.openxmlformats.org/officeDocument/2006/relationships" xmlns:p="http://schemas.openxmlformats.org/presentationml/2006/main" xmlns:m="http://schemas.openxmlformats.org/officeDocument/2006/math" xmlns:w="http://schemas.openxmlformats.org/wordprocessingml/2006/main" xmlns:mc="http://schemas.openxmlformats.org/markup-compatibility/2006" showMasterPhAnim="0" showMasterSp="1" show="1">
-  <p:cSld name="">
+<p:sld xmlns:a="http://schemas.openxmlformats.org/drawingml/2006/main" xmlns:r="http://schemas.openxmlformats.org/officeDocument/2006/relationships" xmlns:p="http://schemas.openxmlformats.org/presentationml/2006/main" showMasterPhAnim="0">
+  <p:cSld>
     <p:spTree>
       <p:nvGrpSpPr>
         <p:cNvPr id="1" name=""/>
@@ -25509,7 +25990,9 @@
       <p:sp>
         <p:nvSpPr>
           <p:cNvPr id="1762418433" name="Google Shape;276;p46"/>
-          <p:cNvSpPr txBox="1"/>
+          <p:cNvSpPr txBox="1">
+            <a:spLocks noGrp="1"/>
+          </p:cNvSpPr>
           <p:nvPr>
             <p:ph type="title"/>
           </p:nvPr>
@@ -25550,7 +26033,9 @@
       <p:sp>
         <p:nvSpPr>
           <p:cNvPr id="712300571" name="Google Shape;278;p46"/>
-          <p:cNvSpPr txBox="1"/>
+          <p:cNvSpPr txBox="1">
+            <a:spLocks noGrp="1"/>
+          </p:cNvSpPr>
           <p:nvPr>
             <p:ph type="sldNum" idx="12"/>
           </p:nvPr>
@@ -25582,7 +26067,7 @@
             </a:pPr>
             <a:fld id="{00000000-1234-1234-1234-123412341234}" type="slidenum">
               <a:rPr lang="ru"/>
-              <a:t>‹#›</a:t>
+              <a:t>9</a:t>
             </a:fld>
             <a:endParaRPr/>
           </a:p>
@@ -25590,12 +26075,12 @@
       </p:sp>
       <p:sp>
         <p:nvSpPr>
-          <p:cNvPr id="55142733" name=""/>
+          <p:cNvPr id="55142733" name="TextBox 55142732"/>
           <p:cNvSpPr txBox="1"/>
           <p:nvPr/>
         </p:nvSpPr>
         <p:spPr bwMode="auto">
-          <a:xfrm flipH="0" flipV="0">
+          <a:xfrm>
             <a:off x="723258" y="1248103"/>
             <a:ext cx="5874455" cy="2332080"/>
           </a:xfrm>
@@ -25605,9 +26090,10 @@
           <a:noFill/>
         </p:spPr>
         <p:txBody>
-          <a:bodyPr vertOverflow="overflow" horzOverflow="overflow" vert="horz" wrap="square" lIns="91440" tIns="45720" rIns="91440" bIns="45720" numCol="1" spcCol="0" rtlCol="0" fromWordArt="0" anchor="t" anchorCtr="0" forceAA="0" upright="0" compatLnSpc="0">
+          <a:bodyPr vertOverflow="overflow" horzOverflow="overflow" vert="horz" wrap="square" lIns="91440" tIns="45720" rIns="91440" bIns="45720" numCol="1" spcCol="0" rtlCol="0" fromWordArt="0" anchor="t" anchorCtr="0" forceAA="0" compatLnSpc="0">
             <a:spAutoFit/>
           </a:bodyPr>
+          <a:lstStyle/>
           <a:p>
             <a:pPr marL="239821" indent="-239821">
               <a:lnSpc>
@@ -25749,19 +26235,11 @@
   <p:clrMapOvr>
     <a:masterClrMapping/>
   </p:clrMapOvr>
-  <mc:AlternateContent xmlns:mc="http://schemas.openxmlformats.org/markup-compatibility/2006">
-    <mc:Choice xmlns:p159="http://schemas.microsoft.com/office/powerpoint/2015/09/main" xmlns:p14="http://schemas.microsoft.com/office/powerpoint/2010/main" Requires="p159">
-      <p:transition p14:dur="2000" advClick="1"/>
-    </mc:Choice>
-    <mc:Fallback>
-      <p:transition advClick="1"/>
-    </mc:Fallback>
-  </mc:AlternateContent>
 </p:sld>
 </file>
 
 <file path=ppt/theme/theme1.xml><?xml version="1.0" encoding="utf-8"?>
-<a:theme xmlns:a="http://schemas.openxmlformats.org/drawingml/2006/main" xmlns:r="http://schemas.openxmlformats.org/officeDocument/2006/relationships" xmlns:p="http://schemas.openxmlformats.org/presentationml/2006/main" name="Simple Light">
+<a:theme xmlns:a="http://schemas.openxmlformats.org/drawingml/2006/main" name="Simple Light">
   <a:themeElements>
     <a:clrScheme name="Simple Light">
       <a:dk1>
@@ -25962,11 +26440,12 @@
     </a:fmtScheme>
   </a:themeElements>
   <a:objectDefaults/>
+  <a:extraClrSchemeLst/>
 </a:theme>
 </file>
 
 <file path=ppt/theme/theme2.xml><?xml version="1.0" encoding="utf-8"?>
-<a:theme xmlns:a="http://schemas.openxmlformats.org/drawingml/2006/main" xmlns:r="http://schemas.openxmlformats.org/officeDocument/2006/relationships" xmlns:p="http://schemas.openxmlformats.org/presentationml/2006/main" name="Тема1">
+<a:theme xmlns:a="http://schemas.openxmlformats.org/drawingml/2006/main" name="Тема1">
   <a:themeElements>
     <a:clrScheme name="Другая 1">
       <a:dk1>
@@ -26167,11 +26646,12 @@
     </a:fmtScheme>
   </a:themeElements>
   <a:objectDefaults/>
+  <a:extraClrSchemeLst/>
 </a:theme>
 </file>
 
 <file path=ppt/theme/theme3.xml><?xml version="1.0" encoding="utf-8"?>
-<a:theme xmlns:a="http://schemas.openxmlformats.org/drawingml/2006/main" xmlns:r="http://schemas.openxmlformats.org/officeDocument/2006/relationships" xmlns:p="http://schemas.openxmlformats.org/presentationml/2006/main" name="">
+<a:theme xmlns:a="http://schemas.openxmlformats.org/drawingml/2006/main">
   <a:themeElements>
     <a:clrScheme name="Default">
       <a:dk1>
@@ -26372,5 +26852,6 @@
     </a:fmtScheme>
   </a:themeElements>
   <a:objectDefaults/>
+  <a:extraClrSchemeLst/>
 </a:theme>
 </file>